--- a/public/fun/cards/creative/creative-02.pptx
+++ b/public/fun/cards/creative/creative-02.pptx
@@ -3085,7 +3085,7 @@
     <p:bg>
       <p:bgPr>
         <a:solidFill>
-          <a:srgbClr val="FBF8F2"/>
+          <a:srgbClr val="FFEAF4"/>
         </a:solidFill>
         <a:effectLst/>
       </p:bgPr>
@@ -3099,14 +3099,72 @@
       <p:grpSpPr/>
       <p:sp>
         <p:nvSpPr>
-          <p:cNvPr id="2" name="텍스트"/>
+          <p:cNvPr id="2" name="Rectangle 1"/>
+          <p:cNvSpPr/>
+          <p:nvPr/>
+        </p:nvSpPr>
+        <p:spPr>
+          <a:xfrm>
+            <a:off x="0" y="0"/>
+            <a:ext cx="1152000" cy="1800000"/>
+          </a:xfrm>
+          <a:prstGeom prst="rect">
+            <a:avLst/>
+          </a:prstGeom>
+          <a:solidFill>
+            <a:srgbClr val="FF2E93"/>
+          </a:solidFill>
+          <a:ln>
+            <a:noFill/>
+          </a:ln>
+        </p:spPr>
+        <p:txBody>
+          <a:bodyPr rtlCol="0" anchor="ctr"/>
+          <a:lstStyle/>
+          <a:p>
+            <a:pPr algn="ctr"/>
+          </a:p>
+        </p:txBody>
+      </p:sp>
+      <p:sp>
+        <p:nvSpPr>
+          <p:cNvPr id="3" name="Oval 2"/>
+          <p:cNvSpPr/>
+          <p:nvPr/>
+        </p:nvSpPr>
+        <p:spPr>
+          <a:xfrm>
+            <a:off x="295200" y="619200"/>
+            <a:ext cx="561600" cy="561600"/>
+          </a:xfrm>
+          <a:prstGeom prst="ellipse">
+            <a:avLst/>
+          </a:prstGeom>
+          <a:noFill/>
+          <a:ln w="10800">
+            <a:solidFill>
+              <a:srgbClr val="FFFFFF"/>
+            </a:solidFill>
+          </a:ln>
+        </p:spPr>
+        <p:txBody>
+          <a:bodyPr rtlCol="0" anchor="ctr"/>
+          <a:lstStyle/>
+          <a:p>
+            <a:pPr algn="ctr"/>
+          </a:p>
+        </p:txBody>
+      </p:sp>
+      <p:sp>
+        <p:nvSpPr>
+          <p:cNvPr id="4" name="텍스트"/>
           <p:cNvSpPr txBox="1"/>
           <p:nvPr/>
         </p:nvSpPr>
         <p:spPr>
           <a:xfrm>
-            <a:off x="360000" y="201600"/>
-            <a:ext cx="2520000" cy="100800"/>
+            <a:off x="216000" y="684000"/>
+            <a:ext cx="720000" cy="432000"/>
           </a:xfrm>
           <a:prstGeom prst="rect">
             <a:avLst/>
@@ -3114,186 +3172,39 @@
           <a:noFill/>
         </p:spPr>
         <p:txBody>
-          <a:bodyPr wrap="square" lIns="0" rIns="0" tIns="0" bIns="0" anchor="t">
+          <a:bodyPr wrap="square" lIns="0" rIns="0" tIns="0" bIns="0" anchor="ctr">
             <a:spAutoFit/>
           </a:bodyPr>
           <a:lstStyle/>
           <a:p>
             <a:pPr algn="ctr">
               <a:lnSpc>
-                <a:spcPts val="1015"/>
+                <a:spcPts val="4930"/>
               </a:lnSpc>
             </a:pPr>
             <a:r>
-              <a:rPr sz="700" b="1" spc="300">
+              <a:rPr sz="3400" b="1">
                 <a:solidFill>
-                  <a:srgbClr val="64727E"/>
+                  <a:srgbClr val="FFFFFF"/>
                 </a:solidFill>
                 <a:latin typeface="맑은 고딕"/>
                 <a:ea typeface="맑은 고딕"/>
               </a:rPr>
-              <a:t>스튜디오 이름</a:t>
-            </a:r>
-          </a:p>
-        </p:txBody>
-      </p:sp>
-      <p:sp>
-        <p:nvSpPr>
-          <p:cNvPr id="3" name="Freeform 2"/>
-          <p:cNvSpPr/>
+              <a:t>이</a:t>
+            </a:r>
+          </a:p>
+        </p:txBody>
+      </p:sp>
+      <p:sp>
+        <p:nvSpPr>
+          <p:cNvPr id="5" name="텍스트"/>
+          <p:cNvSpPr txBox="1"/>
           <p:nvPr/>
         </p:nvSpPr>
         <p:spPr>
           <a:xfrm>
-            <a:off x="1572908" y="423930"/>
-            <a:ext cx="119175" cy="130357"/>
-          </a:xfrm>
-          <a:custGeom>
-            <a:avLst/>
-            <a:gdLst/>
-            <a:ahLst/>
-            <a:cxnLst/>
-            <a:rect l="l" t="t" r="r" b="b"/>
-            <a:pathLst>
-              <a:path w="119175" h="130357">
-                <a:moveTo>
-                  <a:pt x="86082" y="0"/>
-                </a:moveTo>
-                <a:lnTo>
-                  <a:pt x="119175" y="27768"/>
-                </a:lnTo>
-                <a:lnTo>
-                  <a:pt x="33093" y="130357"/>
-                </a:lnTo>
-                <a:lnTo>
-                  <a:pt x="0" y="102588"/>
-                </a:lnTo>
-                <a:close/>
-              </a:path>
-            </a:pathLst>
-          </a:custGeom>
-          <a:solidFill>
-            <a:srgbClr val="913B3E"/>
-          </a:solidFill>
-          <a:ln>
-            <a:noFill/>
-          </a:ln>
-        </p:spPr>
-        <p:txBody>
-          <a:bodyPr rtlCol="0" anchor="ctr"/>
-          <a:lstStyle/>
-          <a:p>
-            <a:pPr algn="ctr"/>
-          </a:p>
-        </p:txBody>
-      </p:sp>
-      <p:sp>
-        <p:nvSpPr>
-          <p:cNvPr id="4" name="Freeform 3"/>
-          <p:cNvSpPr/>
-          <p:nvPr/>
-        </p:nvSpPr>
-        <p:spPr>
-          <a:xfrm>
-            <a:off x="1558909" y="526518"/>
-            <a:ext cx="47092" cy="50287"/>
-          </a:xfrm>
-          <a:custGeom>
-            <a:avLst/>
-            <a:gdLst/>
-            <a:ahLst/>
-            <a:cxnLst/>
-            <a:rect l="l" t="t" r="r" b="b"/>
-            <a:pathLst>
-              <a:path w="47092" h="50287">
-                <a:moveTo>
-                  <a:pt x="13999" y="0"/>
-                </a:moveTo>
-                <a:lnTo>
-                  <a:pt x="47092" y="27769"/>
-                </a:lnTo>
-                <a:lnTo>
-                  <a:pt x="0" y="50287"/>
-                </a:lnTo>
-                <a:close/>
-              </a:path>
-            </a:pathLst>
-          </a:custGeom>
-          <a:solidFill>
-            <a:srgbClr val="E0C8C9"/>
-          </a:solidFill>
-          <a:ln>
-            <a:noFill/>
-          </a:ln>
-        </p:spPr>
-        <p:txBody>
-          <a:bodyPr rtlCol="0" anchor="ctr"/>
-          <a:lstStyle/>
-          <a:p>
-            <a:pPr algn="ctr"/>
-          </a:p>
-        </p:txBody>
-      </p:sp>
-      <p:sp>
-        <p:nvSpPr>
-          <p:cNvPr id="5" name="Freeform 4"/>
-          <p:cNvSpPr/>
-          <p:nvPr/>
-        </p:nvSpPr>
-        <p:spPr>
-          <a:xfrm>
-            <a:off x="1658990" y="407383"/>
-            <a:ext cx="46978" cy="44315"/>
-          </a:xfrm>
-          <a:custGeom>
-            <a:avLst/>
-            <a:gdLst/>
-            <a:ahLst/>
-            <a:cxnLst/>
-            <a:rect l="l" t="t" r="r" b="b"/>
-            <a:pathLst>
-              <a:path w="46978" h="44315">
-                <a:moveTo>
-                  <a:pt x="13885" y="0"/>
-                </a:moveTo>
-                <a:lnTo>
-                  <a:pt x="46978" y="27768"/>
-                </a:lnTo>
-                <a:lnTo>
-                  <a:pt x="33093" y="44315"/>
-                </a:lnTo>
-                <a:lnTo>
-                  <a:pt x="0" y="16547"/>
-                </a:lnTo>
-                <a:close/>
-              </a:path>
-            </a:pathLst>
-          </a:custGeom>
-          <a:solidFill>
-            <a:srgbClr val="E0C8C9"/>
-          </a:solidFill>
-          <a:ln>
-            <a:noFill/>
-          </a:ln>
-        </p:spPr>
-        <p:txBody>
-          <a:bodyPr rtlCol="0" anchor="ctr"/>
-          <a:lstStyle/>
-          <a:p>
-            <a:pPr algn="ctr"/>
-          </a:p>
-        </p:txBody>
-      </p:sp>
-      <p:sp>
-        <p:nvSpPr>
-          <p:cNvPr id="6" name="텍스트"/>
-          <p:cNvSpPr txBox="1"/>
-          <p:nvPr/>
-        </p:nvSpPr>
-        <p:spPr>
-          <a:xfrm>
-            <a:off x="360000" y="684000"/>
-            <a:ext cx="2520000" cy="313692"/>
+            <a:off x="1404000" y="223200"/>
+            <a:ext cx="1584000" cy="133351"/>
           </a:xfrm>
           <a:prstGeom prst="rect">
             <a:avLst/>
@@ -3306,34 +3217,34 @@
           </a:bodyPr>
           <a:lstStyle/>
           <a:p>
-            <a:pPr algn="ctr">
+            <a:pPr algn="l">
               <a:lnSpc>
-                <a:spcPts val="2755"/>
+                <a:spcPts val="1015"/>
               </a:lnSpc>
             </a:pPr>
             <a:r>
-              <a:rPr sz="1900" b="1" spc="50">
+              <a:rPr sz="700" b="1" spc="200">
                 <a:solidFill>
-                  <a:srgbClr val="122A3F"/>
+                  <a:srgbClr val="6C1E49"/>
                 </a:solidFill>
                 <a:latin typeface="맑은 고딕"/>
                 <a:ea typeface="맑은 고딕"/>
               </a:rPr>
-              <a:t>이서준</a:t>
-            </a:r>
-          </a:p>
-        </p:txBody>
-      </p:sp>
-      <p:sp>
-        <p:nvSpPr>
-          <p:cNvPr id="7" name="텍스트"/>
+              <a:t>스튜디오 이름</a:t>
+            </a:r>
+          </a:p>
+        </p:txBody>
+      </p:sp>
+      <p:sp>
+        <p:nvSpPr>
+          <p:cNvPr id="6" name="텍스트"/>
           <p:cNvSpPr txBox="1"/>
           <p:nvPr/>
         </p:nvSpPr>
         <p:spPr>
           <a:xfrm>
-            <a:off x="360000" y="1051200"/>
-            <a:ext cx="2520000" cy="122400"/>
+            <a:off x="1404000" y="540000"/>
+            <a:ext cx="1584000" cy="360000"/>
           </a:xfrm>
           <a:prstGeom prst="rect">
             <a:avLst/>
@@ -3346,63 +3257,34 @@
           </a:bodyPr>
           <a:lstStyle/>
           <a:p>
-            <a:pPr algn="ctr">
+            <a:pPr algn="l">
               <a:lnSpc>
-                <a:spcPts val="1232"/>
+                <a:spcPts val="3190"/>
               </a:lnSpc>
             </a:pPr>
             <a:r>
-              <a:rPr sz="850" b="1">
+              <a:rPr sz="2200" b="1">
                 <a:solidFill>
-                  <a:srgbClr val="913B3E"/>
+                  <a:srgbClr val="12151C"/>
                 </a:solidFill>
                 <a:latin typeface="맑은 고딕"/>
                 <a:ea typeface="맑은 고딕"/>
               </a:rPr>
-              <a:t>사진작가</a:t>
-            </a:r>
-          </a:p>
-        </p:txBody>
-      </p:sp>
-      <p:sp>
-        <p:nvSpPr>
-          <p:cNvPr id="8" name="Rectangle 7"/>
-          <p:cNvSpPr/>
+              <a:t>이서준</a:t>
+            </a:r>
+          </a:p>
+        </p:txBody>
+      </p:sp>
+      <p:sp>
+        <p:nvSpPr>
+          <p:cNvPr id="7" name="텍스트"/>
+          <p:cNvSpPr txBox="1"/>
           <p:nvPr/>
         </p:nvSpPr>
         <p:spPr>
           <a:xfrm>
-            <a:off x="1512000" y="1245600"/>
-            <a:ext cx="216000" cy="10800"/>
-          </a:xfrm>
-          <a:prstGeom prst="rect">
-            <a:avLst/>
-          </a:prstGeom>
-          <a:solidFill>
-            <a:srgbClr val="913B3E"/>
-          </a:solidFill>
-          <a:ln>
-            <a:noFill/>
-          </a:ln>
-        </p:spPr>
-        <p:txBody>
-          <a:bodyPr rtlCol="0" anchor="ctr"/>
-          <a:lstStyle/>
-          <a:p>
-            <a:pPr algn="ctr"/>
-          </a:p>
-        </p:txBody>
-      </p:sp>
-      <p:sp>
-        <p:nvSpPr>
-          <p:cNvPr id="9" name="텍스트"/>
-          <p:cNvSpPr txBox="1"/>
-          <p:nvPr/>
-        </p:nvSpPr>
-        <p:spPr>
-          <a:xfrm>
-            <a:off x="360000" y="1339200"/>
-            <a:ext cx="2520000" cy="108000"/>
+            <a:off x="1404000" y="943200"/>
+            <a:ext cx="1584000" cy="171451"/>
           </a:xfrm>
           <a:prstGeom prst="rect">
             <a:avLst/>
@@ -3415,34 +3297,63 @@
           </a:bodyPr>
           <a:lstStyle/>
           <a:p>
-            <a:pPr algn="ctr">
+            <a:pPr algn="l">
               <a:lnSpc>
-                <a:spcPts val="1015"/>
+                <a:spcPts val="1305"/>
               </a:lnSpc>
             </a:pPr>
             <a:r>
-              <a:rPr sz="700" b="0">
+              <a:rPr sz="900" b="0">
                 <a:solidFill>
-                  <a:srgbClr val="122A3F"/>
+                  <a:srgbClr val="6C1E49"/>
                 </a:solidFill>
                 <a:latin typeface="맑은 고딕"/>
                 <a:ea typeface="맑은 고딕"/>
               </a:rPr>
-              <a:t>010-1234-5678   ·   name@example.com</a:t>
-            </a:r>
-          </a:p>
-        </p:txBody>
-      </p:sp>
-      <p:sp>
-        <p:nvSpPr>
-          <p:cNvPr id="10" name="텍스트"/>
+              <a:t>사진작가</a:t>
+            </a:r>
+          </a:p>
+        </p:txBody>
+      </p:sp>
+      <p:sp>
+        <p:nvSpPr>
+          <p:cNvPr id="8" name="Rectangle 7"/>
+          <p:cNvSpPr/>
+          <p:nvPr/>
+        </p:nvSpPr>
+        <p:spPr>
+          <a:xfrm>
+            <a:off x="1404000" y="1195200"/>
+            <a:ext cx="144000" cy="18000"/>
+          </a:xfrm>
+          <a:prstGeom prst="rect">
+            <a:avLst/>
+          </a:prstGeom>
+          <a:solidFill>
+            <a:srgbClr val="FF2E93"/>
+          </a:solidFill>
+          <a:ln>
+            <a:noFill/>
+          </a:ln>
+        </p:spPr>
+        <p:txBody>
+          <a:bodyPr rtlCol="0" anchor="ctr"/>
+          <a:lstStyle/>
+          <a:p>
+            <a:pPr algn="ctr"/>
+          </a:p>
+        </p:txBody>
+      </p:sp>
+      <p:sp>
+        <p:nvSpPr>
+          <p:cNvPr id="9" name="텍스트"/>
           <p:cNvSpPr txBox="1"/>
           <p:nvPr/>
         </p:nvSpPr>
         <p:spPr>
           <a:xfrm>
-            <a:off x="360000" y="1468800"/>
-            <a:ext cx="2520000" cy="108000"/>
+            <a:off x="1404000" y="1328400"/>
+            <a:ext cx="331200" cy="99061"/>
           </a:xfrm>
           <a:prstGeom prst="rect">
             <a:avLst/>
@@ -3455,7 +3366,47 @@
           </a:bodyPr>
           <a:lstStyle/>
           <a:p>
-            <a:pPr algn="ctr">
+            <a:pPr algn="l">
+              <a:lnSpc>
+                <a:spcPts val="754"/>
+              </a:lnSpc>
+            </a:pPr>
+            <a:r>
+              <a:rPr sz="520" b="1" spc="120">
+                <a:solidFill>
+                  <a:srgbClr val="6C1E49"/>
+                </a:solidFill>
+                <a:latin typeface="맑은 고딕"/>
+                <a:ea typeface="맑은 고딕"/>
+              </a:rPr>
+              <a:t>TEL</a:t>
+            </a:r>
+          </a:p>
+        </p:txBody>
+      </p:sp>
+      <p:sp>
+        <p:nvSpPr>
+          <p:cNvPr id="10" name="텍스트"/>
+          <p:cNvSpPr txBox="1"/>
+          <p:nvPr/>
+        </p:nvSpPr>
+        <p:spPr>
+          <a:xfrm>
+            <a:off x="1735200" y="1317600"/>
+            <a:ext cx="1440000" cy="133351"/>
+          </a:xfrm>
+          <a:prstGeom prst="rect">
+            <a:avLst/>
+          </a:prstGeom>
+          <a:noFill/>
+        </p:spPr>
+        <p:txBody>
+          <a:bodyPr wrap="square" lIns="0" rIns="0" tIns="0" bIns="0" anchor="t">
+            <a:spAutoFit/>
+          </a:bodyPr>
+          <a:lstStyle/>
+          <a:p>
+            <a:pPr algn="l">
               <a:lnSpc>
                 <a:spcPts val="1015"/>
               </a:lnSpc>
@@ -3463,7 +3414,167 @@
             <a:r>
               <a:rPr sz="700" b="0">
                 <a:solidFill>
-                  <a:srgbClr val="64727E"/>
+                  <a:srgbClr val="12151C"/>
+                </a:solidFill>
+                <a:latin typeface="맑은 고딕"/>
+                <a:ea typeface="맑은 고딕"/>
+              </a:rPr>
+              <a:t>010-1234-5678</a:t>
+            </a:r>
+          </a:p>
+        </p:txBody>
+      </p:sp>
+      <p:sp>
+        <p:nvSpPr>
+          <p:cNvPr id="11" name="텍스트"/>
+          <p:cNvSpPr txBox="1"/>
+          <p:nvPr/>
+        </p:nvSpPr>
+        <p:spPr>
+          <a:xfrm>
+            <a:off x="1404000" y="1458000"/>
+            <a:ext cx="331200" cy="99061"/>
+          </a:xfrm>
+          <a:prstGeom prst="rect">
+            <a:avLst/>
+          </a:prstGeom>
+          <a:noFill/>
+        </p:spPr>
+        <p:txBody>
+          <a:bodyPr wrap="square" lIns="0" rIns="0" tIns="0" bIns="0" anchor="t">
+            <a:spAutoFit/>
+          </a:bodyPr>
+          <a:lstStyle/>
+          <a:p>
+            <a:pPr algn="l">
+              <a:lnSpc>
+                <a:spcPts val="754"/>
+              </a:lnSpc>
+            </a:pPr>
+            <a:r>
+              <a:rPr sz="520" b="1" spc="120">
+                <a:solidFill>
+                  <a:srgbClr val="6C1E49"/>
+                </a:solidFill>
+                <a:latin typeface="맑은 고딕"/>
+                <a:ea typeface="맑은 고딕"/>
+              </a:rPr>
+              <a:t>MAIL</a:t>
+            </a:r>
+          </a:p>
+        </p:txBody>
+      </p:sp>
+      <p:sp>
+        <p:nvSpPr>
+          <p:cNvPr id="12" name="텍스트"/>
+          <p:cNvSpPr txBox="1"/>
+          <p:nvPr/>
+        </p:nvSpPr>
+        <p:spPr>
+          <a:xfrm>
+            <a:off x="1735200" y="1447200"/>
+            <a:ext cx="1440000" cy="133351"/>
+          </a:xfrm>
+          <a:prstGeom prst="rect">
+            <a:avLst/>
+          </a:prstGeom>
+          <a:noFill/>
+        </p:spPr>
+        <p:txBody>
+          <a:bodyPr wrap="square" lIns="0" rIns="0" tIns="0" bIns="0" anchor="t">
+            <a:spAutoFit/>
+          </a:bodyPr>
+          <a:lstStyle/>
+          <a:p>
+            <a:pPr algn="l">
+              <a:lnSpc>
+                <a:spcPts val="1015"/>
+              </a:lnSpc>
+            </a:pPr>
+            <a:r>
+              <a:rPr sz="700" b="0">
+                <a:solidFill>
+                  <a:srgbClr val="12151C"/>
+                </a:solidFill>
+                <a:latin typeface="맑은 고딕"/>
+                <a:ea typeface="맑은 고딕"/>
+              </a:rPr>
+              <a:t>name@example.com</a:t>
+            </a:r>
+          </a:p>
+        </p:txBody>
+      </p:sp>
+      <p:sp>
+        <p:nvSpPr>
+          <p:cNvPr id="13" name="텍스트"/>
+          <p:cNvSpPr txBox="1"/>
+          <p:nvPr/>
+        </p:nvSpPr>
+        <p:spPr>
+          <a:xfrm>
+            <a:off x="1404000" y="1587600"/>
+            <a:ext cx="331200" cy="99061"/>
+          </a:xfrm>
+          <a:prstGeom prst="rect">
+            <a:avLst/>
+          </a:prstGeom>
+          <a:noFill/>
+        </p:spPr>
+        <p:txBody>
+          <a:bodyPr wrap="square" lIns="0" rIns="0" tIns="0" bIns="0" anchor="t">
+            <a:spAutoFit/>
+          </a:bodyPr>
+          <a:lstStyle/>
+          <a:p>
+            <a:pPr algn="l">
+              <a:lnSpc>
+                <a:spcPts val="754"/>
+              </a:lnSpc>
+            </a:pPr>
+            <a:r>
+              <a:rPr sz="520" b="1" spc="120">
+                <a:solidFill>
+                  <a:srgbClr val="6C1E49"/>
+                </a:solidFill>
+                <a:latin typeface="맑은 고딕"/>
+                <a:ea typeface="맑은 고딕"/>
+              </a:rPr>
+              <a:t>ADDR</a:t>
+            </a:r>
+          </a:p>
+        </p:txBody>
+      </p:sp>
+      <p:sp>
+        <p:nvSpPr>
+          <p:cNvPr id="14" name="텍스트"/>
+          <p:cNvSpPr txBox="1"/>
+          <p:nvPr/>
+        </p:nvSpPr>
+        <p:spPr>
+          <a:xfrm>
+            <a:off x="1735200" y="1576800"/>
+            <a:ext cx="1440000" cy="133351"/>
+          </a:xfrm>
+          <a:prstGeom prst="rect">
+            <a:avLst/>
+          </a:prstGeom>
+          <a:noFill/>
+        </p:spPr>
+        <p:txBody>
+          <a:bodyPr wrap="square" lIns="0" rIns="0" tIns="0" bIns="0" anchor="t">
+            <a:spAutoFit/>
+          </a:bodyPr>
+          <a:lstStyle/>
+          <a:p>
+            <a:pPr algn="l">
+              <a:lnSpc>
+                <a:spcPts val="1015"/>
+              </a:lnSpc>
+            </a:pPr>
+            <a:r>
+              <a:rPr sz="700" b="0">
+                <a:solidFill>
+                  <a:srgbClr val="12151C"/>
                 </a:solidFill>
                 <a:latin typeface="맑은 고딕"/>
                 <a:ea typeface="맑은 고딕"/>
@@ -3487,7 +3598,7 @@
     <p:bg>
       <p:bgPr>
         <a:solidFill>
-          <a:srgbClr val="122A3F"/>
+          <a:srgbClr val="0E1116"/>
         </a:solidFill>
         <a:effectLst/>
       </p:bgPr>
@@ -3507,16 +3618,45 @@
         </p:nvSpPr>
         <p:spPr>
           <a:xfrm>
-            <a:off x="108000" y="108000"/>
-            <a:ext cx="3024000" cy="1584000"/>
+            <a:off x="2088000" y="0"/>
+            <a:ext cx="1152000" cy="1800000"/>
           </a:xfrm>
           <a:prstGeom prst="rect">
+            <a:avLst/>
+          </a:prstGeom>
+          <a:solidFill>
+            <a:srgbClr val="FF2E93"/>
+          </a:solidFill>
+          <a:ln>
+            <a:noFill/>
+          </a:ln>
+        </p:spPr>
+        <p:txBody>
+          <a:bodyPr rtlCol="0" anchor="ctr"/>
+          <a:lstStyle/>
+          <a:p>
+            <a:pPr algn="ctr"/>
+          </a:p>
+        </p:txBody>
+      </p:sp>
+      <p:sp>
+        <p:nvSpPr>
+          <p:cNvPr id="3" name="Oval 2"/>
+          <p:cNvSpPr/>
+          <p:nvPr/>
+        </p:nvSpPr>
+        <p:spPr>
+          <a:xfrm>
+            <a:off x="2397600" y="633600"/>
+            <a:ext cx="532800" cy="532800"/>
+          </a:xfrm>
+          <a:prstGeom prst="ellipse">
             <a:avLst/>
           </a:prstGeom>
           <a:noFill/>
           <a:ln w="10800">
             <a:solidFill>
-              <a:srgbClr val="6388A8"/>
+              <a:srgbClr val="FFFFFF"/>
             </a:solidFill>
           </a:ln>
         </p:spPr>
@@ -3530,14 +3670,14 @@
       </p:sp>
       <p:sp>
         <p:nvSpPr>
-          <p:cNvPr id="3" name="텍스트"/>
+          <p:cNvPr id="4" name="텍스트"/>
           <p:cNvSpPr txBox="1"/>
           <p:nvPr/>
         </p:nvSpPr>
         <p:spPr>
           <a:xfrm>
-            <a:off x="396000" y="504000"/>
-            <a:ext cx="2448000" cy="432000"/>
+            <a:off x="2304000" y="684000"/>
+            <a:ext cx="720000" cy="432000"/>
           </a:xfrm>
           <a:prstGeom prst="rect">
             <a:avLst/>
@@ -3551,6 +3691,46 @@
           <a:lstStyle/>
           <a:p>
             <a:pPr algn="ctr">
+              <a:lnSpc>
+                <a:spcPts val="4350"/>
+              </a:lnSpc>
+            </a:pPr>
+            <a:r>
+              <a:rPr sz="3000" b="1">
+                <a:solidFill>
+                  <a:srgbClr val="FFFFFF"/>
+                </a:solidFill>
+                <a:latin typeface="맑은 고딕"/>
+                <a:ea typeface="맑은 고딕"/>
+              </a:rPr>
+              <a:t>스</a:t>
+            </a:r>
+          </a:p>
+        </p:txBody>
+      </p:sp>
+      <p:sp>
+        <p:nvSpPr>
+          <p:cNvPr id="5" name="텍스트"/>
+          <p:cNvSpPr txBox="1"/>
+          <p:nvPr/>
+        </p:nvSpPr>
+        <p:spPr>
+          <a:xfrm>
+            <a:off x="252000" y="540000"/>
+            <a:ext cx="1620000" cy="720000"/>
+          </a:xfrm>
+          <a:prstGeom prst="rect">
+            <a:avLst/>
+          </a:prstGeom>
+          <a:noFill/>
+        </p:spPr>
+        <p:txBody>
+          <a:bodyPr wrap="square" lIns="0" rIns="0" tIns="0" bIns="0" anchor="t">
+            <a:spAutoFit/>
+          </a:bodyPr>
+          <a:lstStyle/>
+          <a:p>
+            <a:pPr algn="l">
               <a:lnSpc>
                 <a:spcPts val="1739"/>
               </a:lnSpc>
@@ -3563,58 +3743,25 @@
                 <a:latin typeface="맑은 고딕"/>
                 <a:ea typeface="맑은 고딕"/>
               </a:rPr>
-              <a:t>순간을 오래 남기는 일을 합니다</a:t>
-            </a:r>
-          </a:p>
-        </p:txBody>
-      </p:sp>
-      <p:cxnSp>
-        <p:nvCxnSpPr>
-          <p:cNvPr id="4" name="Connector 3"/>
-          <p:cNvCxnSpPr/>
-          <p:nvPr/>
-        </p:nvCxnSpPr>
-        <p:spPr>
-          <a:xfrm>
-            <a:off x="1260000" y="1080000"/>
-            <a:ext cx="684000" cy="0"/>
-          </a:xfrm>
-          <a:prstGeom prst="line">
-            <a:avLst/>
-          </a:prstGeom>
-          <a:ln w="7200">
-            <a:solidFill>
-              <a:srgbClr val="6388A8"/>
-            </a:solidFill>
-          </a:ln>
-        </p:spPr>
-      </p:cxnSp>
-      <p:sp>
-        <p:nvSpPr>
-          <p:cNvPr id="5" name="Oval 4"/>
-          <p:cNvSpPr/>
-          <p:nvPr/>
-        </p:nvSpPr>
-        <p:spPr>
-          <a:xfrm>
-            <a:off x="1594800" y="1054800"/>
-            <a:ext cx="50400" cy="50400"/>
-          </a:xfrm>
-          <a:prstGeom prst="ellipse">
-            <a:avLst/>
-          </a:prstGeom>
-          <a:solidFill>
-            <a:srgbClr val="6388A8"/>
-          </a:solidFill>
-          <a:ln>
-            <a:noFill/>
-          </a:ln>
-        </p:spPr>
-        <p:txBody>
-          <a:bodyPr rtlCol="0" anchor="ctr"/>
-          <a:lstStyle/>
-          <a:p>
-            <a:pPr algn="ctr"/>
+              <a:t>순간을 오래 남기는</a:t>
+            </a:r>
+          </a:p>
+          <a:p>
+            <a:pPr algn="l">
+              <a:lnSpc>
+                <a:spcPts val="1739"/>
+              </a:lnSpc>
+            </a:pPr>
+            <a:r>
+              <a:rPr sz="1200" b="1">
+                <a:solidFill>
+                  <a:srgbClr val="FFFFFF"/>
+                </a:solidFill>
+                <a:latin typeface="맑은 고딕"/>
+                <a:ea typeface="맑은 고딕"/>
+              </a:rPr>
+              <a:t>일을 합니다</a:t>
+            </a:r>
           </a:p>
         </p:txBody>
       </p:sp>
@@ -3626,8 +3773,8 @@
         </p:nvSpPr>
         <p:spPr>
           <a:xfrm>
-            <a:off x="360000" y="1224000"/>
-            <a:ext cx="2520000" cy="108000"/>
+            <a:off x="252000" y="1512000"/>
+            <a:ext cx="1584000" cy="123826"/>
           </a:xfrm>
           <a:prstGeom prst="rect">
             <a:avLst/>
@@ -3640,168 +3787,21 @@
           </a:bodyPr>
           <a:lstStyle/>
           <a:p>
-            <a:pPr algn="ctr">
+            <a:pPr algn="l">
               <a:lnSpc>
-                <a:spcPts val="1087"/>
+                <a:spcPts val="942"/>
               </a:lnSpc>
             </a:pPr>
             <a:r>
-              <a:rPr sz="750" b="1" spc="300">
+              <a:rPr sz="650" b="1" spc="200">
                 <a:solidFill>
-                  <a:srgbClr val="ACB4BC"/>
+                  <a:srgbClr val="A3A9B5"/>
                 </a:solidFill>
                 <a:latin typeface="맑은 고딕"/>
                 <a:ea typeface="맑은 고딕"/>
               </a:rPr>
               <a:t>스튜디오 이름</a:t>
             </a:r>
-          </a:p>
-        </p:txBody>
-      </p:sp>
-      <p:sp>
-        <p:nvSpPr>
-          <p:cNvPr id="7" name="Freeform 6"/>
-          <p:cNvSpPr/>
-          <p:nvPr/>
-        </p:nvSpPr>
-        <p:spPr>
-          <a:xfrm>
-            <a:off x="1580757" y="257275"/>
-            <a:ext cx="99313" cy="108631"/>
-          </a:xfrm>
-          <a:custGeom>
-            <a:avLst/>
-            <a:gdLst/>
-            <a:ahLst/>
-            <a:cxnLst/>
-            <a:rect l="l" t="t" r="r" b="b"/>
-            <a:pathLst>
-              <a:path w="99313" h="108631">
-                <a:moveTo>
-                  <a:pt x="71735" y="0"/>
-                </a:moveTo>
-                <a:lnTo>
-                  <a:pt x="99313" y="23140"/>
-                </a:lnTo>
-                <a:lnTo>
-                  <a:pt x="27577" y="108631"/>
-                </a:lnTo>
-                <a:lnTo>
-                  <a:pt x="0" y="85490"/>
-                </a:lnTo>
-                <a:close/>
-              </a:path>
-            </a:pathLst>
-          </a:custGeom>
-          <a:solidFill>
-            <a:srgbClr val="6388A8"/>
-          </a:solidFill>
-          <a:ln>
-            <a:noFill/>
-          </a:ln>
-        </p:spPr>
-        <p:txBody>
-          <a:bodyPr rtlCol="0" anchor="ctr"/>
-          <a:lstStyle/>
-          <a:p>
-            <a:pPr algn="ctr"/>
-          </a:p>
-        </p:txBody>
-      </p:sp>
-      <p:sp>
-        <p:nvSpPr>
-          <p:cNvPr id="8" name="Freeform 7"/>
-          <p:cNvSpPr/>
-          <p:nvPr/>
-        </p:nvSpPr>
-        <p:spPr>
-          <a:xfrm>
-            <a:off x="1569091" y="342765"/>
-            <a:ext cx="39243" cy="41906"/>
-          </a:xfrm>
-          <a:custGeom>
-            <a:avLst/>
-            <a:gdLst/>
-            <a:ahLst/>
-            <a:cxnLst/>
-            <a:rect l="l" t="t" r="r" b="b"/>
-            <a:pathLst>
-              <a:path w="39243" h="41906">
-                <a:moveTo>
-                  <a:pt x="11666" y="0"/>
-                </a:moveTo>
-                <a:lnTo>
-                  <a:pt x="39243" y="23141"/>
-                </a:lnTo>
-                <a:lnTo>
-                  <a:pt x="0" y="41906"/>
-                </a:lnTo>
-                <a:close/>
-              </a:path>
-            </a:pathLst>
-          </a:custGeom>
-          <a:solidFill>
-            <a:srgbClr val="384C5E"/>
-          </a:solidFill>
-          <a:ln>
-            <a:noFill/>
-          </a:ln>
-        </p:spPr>
-        <p:txBody>
-          <a:bodyPr rtlCol="0" anchor="ctr"/>
-          <a:lstStyle/>
-          <a:p>
-            <a:pPr algn="ctr"/>
-          </a:p>
-        </p:txBody>
-      </p:sp>
-      <p:sp>
-        <p:nvSpPr>
-          <p:cNvPr id="9" name="Freeform 8"/>
-          <p:cNvSpPr/>
-          <p:nvPr/>
-        </p:nvSpPr>
-        <p:spPr>
-          <a:xfrm>
-            <a:off x="1652492" y="243486"/>
-            <a:ext cx="39148" cy="36929"/>
-          </a:xfrm>
-          <a:custGeom>
-            <a:avLst/>
-            <a:gdLst/>
-            <a:ahLst/>
-            <a:cxnLst/>
-            <a:rect l="l" t="t" r="r" b="b"/>
-            <a:pathLst>
-              <a:path w="39148" h="36929">
-                <a:moveTo>
-                  <a:pt x="11570" y="0"/>
-                </a:moveTo>
-                <a:lnTo>
-                  <a:pt x="39148" y="23140"/>
-                </a:lnTo>
-                <a:lnTo>
-                  <a:pt x="27578" y="36929"/>
-                </a:lnTo>
-                <a:lnTo>
-                  <a:pt x="0" y="13789"/>
-                </a:lnTo>
-                <a:close/>
-              </a:path>
-            </a:pathLst>
-          </a:custGeom>
-          <a:solidFill>
-            <a:srgbClr val="384C5E"/>
-          </a:solidFill>
-          <a:ln>
-            <a:noFill/>
-          </a:ln>
-        </p:spPr>
-        <p:txBody>
-          <a:bodyPr rtlCol="0" anchor="ctr"/>
-          <a:lstStyle/>
-          <a:p>
-            <a:pPr algn="ctr"/>
           </a:p>
         </p:txBody>
       </p:sp>

--- a/public/fun/cards/creative/creative-02.pptx
+++ b/public/fun/cards/creative/creative-02.pptx
@@ -3106,7 +3106,7 @@
         <p:spPr>
           <a:xfrm>
             <a:off x="0" y="0"/>
-            <a:ext cx="1152000" cy="1800000"/>
+            <a:ext cx="756000" cy="1800000"/>
           </a:xfrm>
           <a:prstGeom prst="rect">
             <a:avLst/>
@@ -3126,22 +3126,568 @@
           </a:p>
         </p:txBody>
       </p:sp>
-      <p:sp>
-        <p:nvSpPr>
-          <p:cNvPr id="3" name="Oval 2"/>
+      <p:cxnSp>
+        <p:nvCxnSpPr>
+          <p:cNvPr id="3" name="Connector 2"/>
+          <p:cNvCxnSpPr/>
+          <p:nvPr/>
+        </p:nvCxnSpPr>
+        <p:spPr>
+          <a:xfrm flipV="1">
+            <a:off x="0" y="1224000"/>
+            <a:ext cx="50400" cy="50400"/>
+          </a:xfrm>
+          <a:prstGeom prst="line">
+            <a:avLst/>
+          </a:prstGeom>
+          <a:ln w="3600">
+            <a:solidFill>
+              <a:srgbClr val="FFFFFF"/>
+            </a:solidFill>
+          </a:ln>
+        </p:spPr>
+      </p:cxnSp>
+      <p:cxnSp>
+        <p:nvCxnSpPr>
+          <p:cNvPr id="4" name="Connector 3"/>
+          <p:cNvCxnSpPr/>
+          <p:nvPr/>
+        </p:nvCxnSpPr>
+        <p:spPr>
+          <a:xfrm flipV="1">
+            <a:off x="0" y="1224000"/>
+            <a:ext cx="100800" cy="100800"/>
+          </a:xfrm>
+          <a:prstGeom prst="line">
+            <a:avLst/>
+          </a:prstGeom>
+          <a:ln w="3600">
+            <a:solidFill>
+              <a:srgbClr val="FFFFFF"/>
+            </a:solidFill>
+          </a:ln>
+        </p:spPr>
+      </p:cxnSp>
+      <p:cxnSp>
+        <p:nvCxnSpPr>
+          <p:cNvPr id="5" name="Connector 4"/>
+          <p:cNvCxnSpPr/>
+          <p:nvPr/>
+        </p:nvCxnSpPr>
+        <p:spPr>
+          <a:xfrm flipV="1">
+            <a:off x="0" y="1224000"/>
+            <a:ext cx="151200" cy="151200"/>
+          </a:xfrm>
+          <a:prstGeom prst="line">
+            <a:avLst/>
+          </a:prstGeom>
+          <a:ln w="3600">
+            <a:solidFill>
+              <a:srgbClr val="FFFFFF"/>
+            </a:solidFill>
+          </a:ln>
+        </p:spPr>
+      </p:cxnSp>
+      <p:cxnSp>
+        <p:nvCxnSpPr>
+          <p:cNvPr id="6" name="Connector 5"/>
+          <p:cNvCxnSpPr/>
+          <p:nvPr/>
+        </p:nvCxnSpPr>
+        <p:spPr>
+          <a:xfrm flipV="1">
+            <a:off x="0" y="1224000"/>
+            <a:ext cx="201600" cy="201600"/>
+          </a:xfrm>
+          <a:prstGeom prst="line">
+            <a:avLst/>
+          </a:prstGeom>
+          <a:ln w="3600">
+            <a:solidFill>
+              <a:srgbClr val="FFFFFF"/>
+            </a:solidFill>
+          </a:ln>
+        </p:spPr>
+      </p:cxnSp>
+      <p:cxnSp>
+        <p:nvCxnSpPr>
+          <p:cNvPr id="7" name="Connector 6"/>
+          <p:cNvCxnSpPr/>
+          <p:nvPr/>
+        </p:nvCxnSpPr>
+        <p:spPr>
+          <a:xfrm flipV="1">
+            <a:off x="0" y="1224000"/>
+            <a:ext cx="252000" cy="252000"/>
+          </a:xfrm>
+          <a:prstGeom prst="line">
+            <a:avLst/>
+          </a:prstGeom>
+          <a:ln w="3600">
+            <a:solidFill>
+              <a:srgbClr val="FFFFFF"/>
+            </a:solidFill>
+          </a:ln>
+        </p:spPr>
+      </p:cxnSp>
+      <p:cxnSp>
+        <p:nvCxnSpPr>
+          <p:cNvPr id="8" name="Connector 7"/>
+          <p:cNvCxnSpPr/>
+          <p:nvPr/>
+        </p:nvCxnSpPr>
+        <p:spPr>
+          <a:xfrm flipV="1">
+            <a:off x="0" y="1224000"/>
+            <a:ext cx="302400" cy="302400"/>
+          </a:xfrm>
+          <a:prstGeom prst="line">
+            <a:avLst/>
+          </a:prstGeom>
+          <a:ln w="3600">
+            <a:solidFill>
+              <a:srgbClr val="FFFFFF"/>
+            </a:solidFill>
+          </a:ln>
+        </p:spPr>
+      </p:cxnSp>
+      <p:cxnSp>
+        <p:nvCxnSpPr>
+          <p:cNvPr id="9" name="Connector 8"/>
+          <p:cNvCxnSpPr/>
+          <p:nvPr/>
+        </p:nvCxnSpPr>
+        <p:spPr>
+          <a:xfrm flipV="1">
+            <a:off x="0" y="1224000"/>
+            <a:ext cx="352800" cy="352800"/>
+          </a:xfrm>
+          <a:prstGeom prst="line">
+            <a:avLst/>
+          </a:prstGeom>
+          <a:ln w="3600">
+            <a:solidFill>
+              <a:srgbClr val="FFFFFF"/>
+            </a:solidFill>
+          </a:ln>
+        </p:spPr>
+      </p:cxnSp>
+      <p:cxnSp>
+        <p:nvCxnSpPr>
+          <p:cNvPr id="10" name="Connector 9"/>
+          <p:cNvCxnSpPr/>
+          <p:nvPr/>
+        </p:nvCxnSpPr>
+        <p:spPr>
+          <a:xfrm flipV="1">
+            <a:off x="0" y="1224000"/>
+            <a:ext cx="403200" cy="403200"/>
+          </a:xfrm>
+          <a:prstGeom prst="line">
+            <a:avLst/>
+          </a:prstGeom>
+          <a:ln w="3600">
+            <a:solidFill>
+              <a:srgbClr val="FFFFFF"/>
+            </a:solidFill>
+          </a:ln>
+        </p:spPr>
+      </p:cxnSp>
+      <p:cxnSp>
+        <p:nvCxnSpPr>
+          <p:cNvPr id="11" name="Connector 10"/>
+          <p:cNvCxnSpPr/>
+          <p:nvPr/>
+        </p:nvCxnSpPr>
+        <p:spPr>
+          <a:xfrm flipV="1">
+            <a:off x="0" y="1224000"/>
+            <a:ext cx="453600" cy="453600"/>
+          </a:xfrm>
+          <a:prstGeom prst="line">
+            <a:avLst/>
+          </a:prstGeom>
+          <a:ln w="3600">
+            <a:solidFill>
+              <a:srgbClr val="FFFFFF"/>
+            </a:solidFill>
+          </a:ln>
+        </p:spPr>
+      </p:cxnSp>
+      <p:cxnSp>
+        <p:nvCxnSpPr>
+          <p:cNvPr id="12" name="Connector 11"/>
+          <p:cNvCxnSpPr/>
+          <p:nvPr/>
+        </p:nvCxnSpPr>
+        <p:spPr>
+          <a:xfrm flipV="1">
+            <a:off x="0" y="1224000"/>
+            <a:ext cx="504000" cy="504000"/>
+          </a:xfrm>
+          <a:prstGeom prst="line">
+            <a:avLst/>
+          </a:prstGeom>
+          <a:ln w="3600">
+            <a:solidFill>
+              <a:srgbClr val="FFFFFF"/>
+            </a:solidFill>
+          </a:ln>
+        </p:spPr>
+      </p:cxnSp>
+      <p:cxnSp>
+        <p:nvCxnSpPr>
+          <p:cNvPr id="13" name="Connector 12"/>
+          <p:cNvCxnSpPr/>
+          <p:nvPr/>
+        </p:nvCxnSpPr>
+        <p:spPr>
+          <a:xfrm flipV="1">
+            <a:off x="0" y="1224000"/>
+            <a:ext cx="554400" cy="554400"/>
+          </a:xfrm>
+          <a:prstGeom prst="line">
+            <a:avLst/>
+          </a:prstGeom>
+          <a:ln w="3600">
+            <a:solidFill>
+              <a:srgbClr val="FFFFFF"/>
+            </a:solidFill>
+          </a:ln>
+        </p:spPr>
+      </p:cxnSp>
+      <p:cxnSp>
+        <p:nvCxnSpPr>
+          <p:cNvPr id="14" name="Connector 13"/>
+          <p:cNvCxnSpPr/>
+          <p:nvPr/>
+        </p:nvCxnSpPr>
+        <p:spPr>
+          <a:xfrm flipV="1">
+            <a:off x="28800" y="1224000"/>
+            <a:ext cx="576000" cy="576000"/>
+          </a:xfrm>
+          <a:prstGeom prst="line">
+            <a:avLst/>
+          </a:prstGeom>
+          <a:ln w="3600">
+            <a:solidFill>
+              <a:srgbClr val="FFFFFF"/>
+            </a:solidFill>
+          </a:ln>
+        </p:spPr>
+      </p:cxnSp>
+      <p:cxnSp>
+        <p:nvCxnSpPr>
+          <p:cNvPr id="15" name="Connector 14"/>
+          <p:cNvCxnSpPr/>
+          <p:nvPr/>
+        </p:nvCxnSpPr>
+        <p:spPr>
+          <a:xfrm flipV="1">
+            <a:off x="79200" y="1224000"/>
+            <a:ext cx="576000" cy="576000"/>
+          </a:xfrm>
+          <a:prstGeom prst="line">
+            <a:avLst/>
+          </a:prstGeom>
+          <a:ln w="3600">
+            <a:solidFill>
+              <a:srgbClr val="FFFFFF"/>
+            </a:solidFill>
+          </a:ln>
+        </p:spPr>
+      </p:cxnSp>
+      <p:cxnSp>
+        <p:nvCxnSpPr>
+          <p:cNvPr id="16" name="Connector 15"/>
+          <p:cNvCxnSpPr/>
+          <p:nvPr/>
+        </p:nvCxnSpPr>
+        <p:spPr>
+          <a:xfrm flipV="1">
+            <a:off x="129600" y="1224000"/>
+            <a:ext cx="576000" cy="576000"/>
+          </a:xfrm>
+          <a:prstGeom prst="line">
+            <a:avLst/>
+          </a:prstGeom>
+          <a:ln w="3600">
+            <a:solidFill>
+              <a:srgbClr val="FFFFFF"/>
+            </a:solidFill>
+          </a:ln>
+        </p:spPr>
+      </p:cxnSp>
+      <p:cxnSp>
+        <p:nvCxnSpPr>
+          <p:cNvPr id="17" name="Connector 16"/>
+          <p:cNvCxnSpPr/>
+          <p:nvPr/>
+        </p:nvCxnSpPr>
+        <p:spPr>
+          <a:xfrm flipV="1">
+            <a:off x="180000" y="1224000"/>
+            <a:ext cx="576000" cy="576000"/>
+          </a:xfrm>
+          <a:prstGeom prst="line">
+            <a:avLst/>
+          </a:prstGeom>
+          <a:ln w="3600">
+            <a:solidFill>
+              <a:srgbClr val="FFFFFF"/>
+            </a:solidFill>
+          </a:ln>
+        </p:spPr>
+      </p:cxnSp>
+      <p:cxnSp>
+        <p:nvCxnSpPr>
+          <p:cNvPr id="18" name="Connector 17"/>
+          <p:cNvCxnSpPr/>
+          <p:nvPr/>
+        </p:nvCxnSpPr>
+        <p:spPr>
+          <a:xfrm flipV="1">
+            <a:off x="230400" y="1274400"/>
+            <a:ext cx="525600" cy="525600"/>
+          </a:xfrm>
+          <a:prstGeom prst="line">
+            <a:avLst/>
+          </a:prstGeom>
+          <a:ln w="3600">
+            <a:solidFill>
+              <a:srgbClr val="FFFFFF"/>
+            </a:solidFill>
+          </a:ln>
+        </p:spPr>
+      </p:cxnSp>
+      <p:cxnSp>
+        <p:nvCxnSpPr>
+          <p:cNvPr id="19" name="Connector 18"/>
+          <p:cNvCxnSpPr/>
+          <p:nvPr/>
+        </p:nvCxnSpPr>
+        <p:spPr>
+          <a:xfrm flipV="1">
+            <a:off x="280800" y="1324800"/>
+            <a:ext cx="475200" cy="475200"/>
+          </a:xfrm>
+          <a:prstGeom prst="line">
+            <a:avLst/>
+          </a:prstGeom>
+          <a:ln w="3600">
+            <a:solidFill>
+              <a:srgbClr val="FFFFFF"/>
+            </a:solidFill>
+          </a:ln>
+        </p:spPr>
+      </p:cxnSp>
+      <p:cxnSp>
+        <p:nvCxnSpPr>
+          <p:cNvPr id="20" name="Connector 19"/>
+          <p:cNvCxnSpPr/>
+          <p:nvPr/>
+        </p:nvCxnSpPr>
+        <p:spPr>
+          <a:xfrm flipV="1">
+            <a:off x="331200" y="1375200"/>
+            <a:ext cx="424800" cy="424800"/>
+          </a:xfrm>
+          <a:prstGeom prst="line">
+            <a:avLst/>
+          </a:prstGeom>
+          <a:ln w="3600">
+            <a:solidFill>
+              <a:srgbClr val="FFFFFF"/>
+            </a:solidFill>
+          </a:ln>
+        </p:spPr>
+      </p:cxnSp>
+      <p:cxnSp>
+        <p:nvCxnSpPr>
+          <p:cNvPr id="21" name="Connector 20"/>
+          <p:cNvCxnSpPr/>
+          <p:nvPr/>
+        </p:nvCxnSpPr>
+        <p:spPr>
+          <a:xfrm flipV="1">
+            <a:off x="381600" y="1425600"/>
+            <a:ext cx="374400" cy="374400"/>
+          </a:xfrm>
+          <a:prstGeom prst="line">
+            <a:avLst/>
+          </a:prstGeom>
+          <a:ln w="3600">
+            <a:solidFill>
+              <a:srgbClr val="FFFFFF"/>
+            </a:solidFill>
+          </a:ln>
+        </p:spPr>
+      </p:cxnSp>
+      <p:cxnSp>
+        <p:nvCxnSpPr>
+          <p:cNvPr id="22" name="Connector 21"/>
+          <p:cNvCxnSpPr/>
+          <p:nvPr/>
+        </p:nvCxnSpPr>
+        <p:spPr>
+          <a:xfrm flipV="1">
+            <a:off x="432000" y="1476000"/>
+            <a:ext cx="324000" cy="324000"/>
+          </a:xfrm>
+          <a:prstGeom prst="line">
+            <a:avLst/>
+          </a:prstGeom>
+          <a:ln w="3600">
+            <a:solidFill>
+              <a:srgbClr val="FFFFFF"/>
+            </a:solidFill>
+          </a:ln>
+        </p:spPr>
+      </p:cxnSp>
+      <p:cxnSp>
+        <p:nvCxnSpPr>
+          <p:cNvPr id="23" name="Connector 22"/>
+          <p:cNvCxnSpPr/>
+          <p:nvPr/>
+        </p:nvCxnSpPr>
+        <p:spPr>
+          <a:xfrm flipV="1">
+            <a:off x="482400" y="1526400"/>
+            <a:ext cx="273600" cy="273600"/>
+          </a:xfrm>
+          <a:prstGeom prst="line">
+            <a:avLst/>
+          </a:prstGeom>
+          <a:ln w="3600">
+            <a:solidFill>
+              <a:srgbClr val="FFFFFF"/>
+            </a:solidFill>
+          </a:ln>
+        </p:spPr>
+      </p:cxnSp>
+      <p:cxnSp>
+        <p:nvCxnSpPr>
+          <p:cNvPr id="24" name="Connector 23"/>
+          <p:cNvCxnSpPr/>
+          <p:nvPr/>
+        </p:nvCxnSpPr>
+        <p:spPr>
+          <a:xfrm flipV="1">
+            <a:off x="532800" y="1576800"/>
+            <a:ext cx="223200" cy="223200"/>
+          </a:xfrm>
+          <a:prstGeom prst="line">
+            <a:avLst/>
+          </a:prstGeom>
+          <a:ln w="3600">
+            <a:solidFill>
+              <a:srgbClr val="FFFFFF"/>
+            </a:solidFill>
+          </a:ln>
+        </p:spPr>
+      </p:cxnSp>
+      <p:cxnSp>
+        <p:nvCxnSpPr>
+          <p:cNvPr id="25" name="Connector 24"/>
+          <p:cNvCxnSpPr/>
+          <p:nvPr/>
+        </p:nvCxnSpPr>
+        <p:spPr>
+          <a:xfrm flipV="1">
+            <a:off x="583200" y="1627200"/>
+            <a:ext cx="172800" cy="172800"/>
+          </a:xfrm>
+          <a:prstGeom prst="line">
+            <a:avLst/>
+          </a:prstGeom>
+          <a:ln w="3600">
+            <a:solidFill>
+              <a:srgbClr val="FFFFFF"/>
+            </a:solidFill>
+          </a:ln>
+        </p:spPr>
+      </p:cxnSp>
+      <p:cxnSp>
+        <p:nvCxnSpPr>
+          <p:cNvPr id="26" name="Connector 25"/>
+          <p:cNvCxnSpPr/>
+          <p:nvPr/>
+        </p:nvCxnSpPr>
+        <p:spPr>
+          <a:xfrm flipV="1">
+            <a:off x="633600" y="1677600"/>
+            <a:ext cx="122400" cy="122400"/>
+          </a:xfrm>
+          <a:prstGeom prst="line">
+            <a:avLst/>
+          </a:prstGeom>
+          <a:ln w="3600">
+            <a:solidFill>
+              <a:srgbClr val="FFFFFF"/>
+            </a:solidFill>
+          </a:ln>
+        </p:spPr>
+      </p:cxnSp>
+      <p:cxnSp>
+        <p:nvCxnSpPr>
+          <p:cNvPr id="27" name="Connector 26"/>
+          <p:cNvCxnSpPr/>
+          <p:nvPr/>
+        </p:nvCxnSpPr>
+        <p:spPr>
+          <a:xfrm flipV="1">
+            <a:off x="684000" y="1728000"/>
+            <a:ext cx="72000" cy="72000"/>
+          </a:xfrm>
+          <a:prstGeom prst="line">
+            <a:avLst/>
+          </a:prstGeom>
+          <a:ln w="3600">
+            <a:solidFill>
+              <a:srgbClr val="FFFFFF"/>
+            </a:solidFill>
+          </a:ln>
+        </p:spPr>
+      </p:cxnSp>
+      <p:cxnSp>
+        <p:nvCxnSpPr>
+          <p:cNvPr id="28" name="Connector 27"/>
+          <p:cNvCxnSpPr/>
+          <p:nvPr/>
+        </p:nvCxnSpPr>
+        <p:spPr>
+          <a:xfrm flipV="1">
+            <a:off x="734400" y="1778400"/>
+            <a:ext cx="21600" cy="21600"/>
+          </a:xfrm>
+          <a:prstGeom prst="line">
+            <a:avLst/>
+          </a:prstGeom>
+          <a:ln w="3600">
+            <a:solidFill>
+              <a:srgbClr val="FFFFFF"/>
+            </a:solidFill>
+          </a:ln>
+        </p:spPr>
+      </p:cxnSp>
+      <p:sp>
+        <p:nvSpPr>
+          <p:cNvPr id="29" name="Oval 28"/>
           <p:cNvSpPr/>
           <p:nvPr/>
         </p:nvSpPr>
         <p:spPr>
           <a:xfrm>
-            <a:off x="295200" y="619200"/>
-            <a:ext cx="561600" cy="561600"/>
+            <a:off x="212400" y="374400"/>
+            <a:ext cx="331200" cy="331200"/>
           </a:xfrm>
           <a:prstGeom prst="ellipse">
             <a:avLst/>
           </a:prstGeom>
           <a:noFill/>
-          <a:ln w="10800">
+          <a:ln w="5760">
             <a:solidFill>
               <a:srgbClr val="FFFFFF"/>
             </a:solidFill>
@@ -3157,14 +3703,14 @@
       </p:sp>
       <p:sp>
         <p:nvSpPr>
-          <p:cNvPr id="4" name="텍스트"/>
+          <p:cNvPr id="30" name="텍스트"/>
           <p:cNvSpPr txBox="1"/>
           <p:nvPr/>
         </p:nvSpPr>
         <p:spPr>
           <a:xfrm>
-            <a:off x="216000" y="684000"/>
-            <a:ext cx="720000" cy="432000"/>
+            <a:off x="198000" y="378000"/>
+            <a:ext cx="360000" cy="324000"/>
           </a:xfrm>
           <a:prstGeom prst="rect">
             <a:avLst/>
@@ -3179,32 +3725,32 @@
           <a:p>
             <a:pPr algn="ctr">
               <a:lnSpc>
-                <a:spcPts val="4930"/>
+                <a:spcPts val="2320"/>
               </a:lnSpc>
             </a:pPr>
             <a:r>
-              <a:rPr sz="3400" b="1">
+              <a:rPr sz="1600" b="1">
                 <a:solidFill>
                   <a:srgbClr val="FFFFFF"/>
                 </a:solidFill>
                 <a:latin typeface="맑은 고딕"/>
                 <a:ea typeface="맑은 고딕"/>
               </a:rPr>
-              <a:t>이</a:t>
-            </a:r>
-          </a:p>
-        </p:txBody>
-      </p:sp>
-      <p:sp>
-        <p:nvSpPr>
-          <p:cNvPr id="5" name="텍스트"/>
+              <a:t>스</a:t>
+            </a:r>
+          </a:p>
+        </p:txBody>
+      </p:sp>
+      <p:sp>
+        <p:nvSpPr>
+          <p:cNvPr id="31" name="텍스트"/>
           <p:cNvSpPr txBox="1"/>
           <p:nvPr/>
         </p:nvSpPr>
         <p:spPr>
           <a:xfrm>
-            <a:off x="1404000" y="223200"/>
-            <a:ext cx="1584000" cy="133351"/>
+            <a:off x="936000" y="252000"/>
+            <a:ext cx="1548000" cy="123826"/>
           </a:xfrm>
           <a:prstGeom prst="rect">
             <a:avLst/>
@@ -3219,11 +3765,11 @@
           <a:p>
             <a:pPr algn="l">
               <a:lnSpc>
-                <a:spcPts val="1015"/>
+                <a:spcPts val="942"/>
               </a:lnSpc>
             </a:pPr>
             <a:r>
-              <a:rPr sz="700" b="1" spc="200">
+              <a:rPr sz="650" b="1" spc="220">
                 <a:solidFill>
                   <a:srgbClr val="6C1E49"/>
                 </a:solidFill>
@@ -3235,16 +3781,37 @@
           </a:p>
         </p:txBody>
       </p:sp>
-      <p:sp>
-        <p:nvSpPr>
-          <p:cNvPr id="6" name="텍스트"/>
+      <p:cxnSp>
+        <p:nvCxnSpPr>
+          <p:cNvPr id="32" name="Connector 31"/>
+          <p:cNvCxnSpPr/>
+          <p:nvPr/>
+        </p:nvCxnSpPr>
+        <p:spPr>
+          <a:xfrm>
+            <a:off x="936000" y="424800"/>
+            <a:ext cx="2052000" cy="0"/>
+          </a:xfrm>
+          <a:prstGeom prst="line">
+            <a:avLst/>
+          </a:prstGeom>
+          <a:ln w="3600">
+            <a:solidFill>
+              <a:srgbClr val="FFC4E1"/>
+            </a:solidFill>
+          </a:ln>
+        </p:spPr>
+      </p:cxnSp>
+      <p:sp>
+        <p:nvSpPr>
+          <p:cNvPr id="33" name="텍스트"/>
           <p:cNvSpPr txBox="1"/>
           <p:nvPr/>
         </p:nvSpPr>
         <p:spPr>
           <a:xfrm>
-            <a:off x="1404000" y="540000"/>
-            <a:ext cx="1584000" cy="360000"/>
+            <a:off x="936000" y="684000"/>
+            <a:ext cx="1800000" cy="237600"/>
           </a:xfrm>
           <a:prstGeom prst="rect">
             <a:avLst/>
@@ -3259,11 +3826,11 @@
           <a:p>
             <a:pPr algn="l">
               <a:lnSpc>
-                <a:spcPts val="3190"/>
+                <a:spcPts val="1957"/>
               </a:lnSpc>
             </a:pPr>
             <a:r>
-              <a:rPr sz="2200" b="1">
+              <a:rPr sz="1350" b="1" spc="120">
                 <a:solidFill>
                   <a:srgbClr val="12151C"/>
                 </a:solidFill>
@@ -3277,14 +3844,14 @@
       </p:sp>
       <p:sp>
         <p:nvSpPr>
-          <p:cNvPr id="7" name="텍스트"/>
+          <p:cNvPr id="34" name="텍스트"/>
           <p:cNvSpPr txBox="1"/>
           <p:nvPr/>
         </p:nvSpPr>
         <p:spPr>
           <a:xfrm>
-            <a:off x="1404000" y="943200"/>
-            <a:ext cx="1584000" cy="171451"/>
+            <a:off x="936000" y="936000"/>
+            <a:ext cx="1800000" cy="133351"/>
           </a:xfrm>
           <a:prstGeom prst="rect">
             <a:avLst/>
@@ -3299,11 +3866,11 @@
           <a:p>
             <a:pPr algn="l">
               <a:lnSpc>
-                <a:spcPts val="1305"/>
+                <a:spcPts val="1015"/>
               </a:lnSpc>
             </a:pPr>
             <a:r>
-              <a:rPr sz="900" b="0">
+              <a:rPr sz="700" b="0" spc="60">
                 <a:solidFill>
                   <a:srgbClr val="6C1E49"/>
                 </a:solidFill>
@@ -3315,45 +3882,37 @@
           </a:p>
         </p:txBody>
       </p:sp>
-      <p:sp>
-        <p:nvSpPr>
-          <p:cNvPr id="8" name="Rectangle 7"/>
-          <p:cNvSpPr/>
-          <p:nvPr/>
-        </p:nvSpPr>
+      <p:cxnSp>
+        <p:nvCxnSpPr>
+          <p:cNvPr id="35" name="Connector 34"/>
+          <p:cNvCxnSpPr/>
+          <p:nvPr/>
+        </p:nvCxnSpPr>
         <p:spPr>
           <a:xfrm>
-            <a:off x="1404000" y="1195200"/>
-            <a:ext cx="144000" cy="18000"/>
-          </a:xfrm>
-          <a:prstGeom prst="rect">
-            <a:avLst/>
-          </a:prstGeom>
-          <a:solidFill>
-            <a:srgbClr val="FF2E93"/>
-          </a:solidFill>
-          <a:ln>
-            <a:noFill/>
-          </a:ln>
-        </p:spPr>
-        <p:txBody>
-          <a:bodyPr rtlCol="0" anchor="ctr"/>
-          <a:lstStyle/>
-          <a:p>
-            <a:pPr algn="ctr"/>
-          </a:p>
-        </p:txBody>
-      </p:sp>
-      <p:sp>
-        <p:nvSpPr>
-          <p:cNvPr id="9" name="텍스트"/>
+            <a:off x="936000" y="1303200"/>
+            <a:ext cx="2052000" cy="0"/>
+          </a:xfrm>
+          <a:prstGeom prst="line">
+            <a:avLst/>
+          </a:prstGeom>
+          <a:ln w="3600">
+            <a:solidFill>
+              <a:srgbClr val="FFC4E1"/>
+            </a:solidFill>
+          </a:ln>
+        </p:spPr>
+      </p:cxnSp>
+      <p:sp>
+        <p:nvSpPr>
+          <p:cNvPr id="36" name="텍스트"/>
           <p:cNvSpPr txBox="1"/>
           <p:nvPr/>
         </p:nvSpPr>
         <p:spPr>
           <a:xfrm>
-            <a:off x="1404000" y="1328400"/>
-            <a:ext cx="331200" cy="99061"/>
+            <a:off x="936000" y="1393200"/>
+            <a:ext cx="331200" cy="91441"/>
           </a:xfrm>
           <a:prstGeom prst="rect">
             <a:avLst/>
@@ -3368,11 +3927,11 @@
           <a:p>
             <a:pPr algn="l">
               <a:lnSpc>
-                <a:spcPts val="754"/>
+                <a:spcPts val="696"/>
               </a:lnSpc>
             </a:pPr>
             <a:r>
-              <a:rPr sz="520" b="1" spc="120">
+              <a:rPr sz="480" b="1" spc="140">
                 <a:solidFill>
                   <a:srgbClr val="6C1E49"/>
                 </a:solidFill>
@@ -3386,14 +3945,14 @@
       </p:sp>
       <p:sp>
         <p:nvSpPr>
-          <p:cNvPr id="10" name="텍스트"/>
+          <p:cNvPr id="37" name="텍스트"/>
           <p:cNvSpPr txBox="1"/>
           <p:nvPr/>
         </p:nvSpPr>
         <p:spPr>
           <a:xfrm>
-            <a:off x="1735200" y="1317600"/>
-            <a:ext cx="1440000" cy="133351"/>
+            <a:off x="1267200" y="1382400"/>
+            <a:ext cx="1188000" cy="123826"/>
           </a:xfrm>
           <a:prstGeom prst="rect">
             <a:avLst/>
@@ -3408,11 +3967,11 @@
           <a:p>
             <a:pPr algn="l">
               <a:lnSpc>
-                <a:spcPts val="1015"/>
+                <a:spcPts val="942"/>
               </a:lnSpc>
             </a:pPr>
             <a:r>
-              <a:rPr sz="700" b="0">
+              <a:rPr sz="650" b="0">
                 <a:solidFill>
                   <a:srgbClr val="12151C"/>
                 </a:solidFill>
@@ -3426,14 +3985,14 @@
       </p:sp>
       <p:sp>
         <p:nvSpPr>
-          <p:cNvPr id="11" name="텍스트"/>
+          <p:cNvPr id="38" name="텍스트"/>
           <p:cNvSpPr txBox="1"/>
           <p:nvPr/>
         </p:nvSpPr>
         <p:spPr>
           <a:xfrm>
-            <a:off x="1404000" y="1458000"/>
-            <a:ext cx="331200" cy="99061"/>
+            <a:off x="936000" y="1515600"/>
+            <a:ext cx="331200" cy="91441"/>
           </a:xfrm>
           <a:prstGeom prst="rect">
             <a:avLst/>
@@ -3448,11 +4007,11 @@
           <a:p>
             <a:pPr algn="l">
               <a:lnSpc>
-                <a:spcPts val="754"/>
+                <a:spcPts val="696"/>
               </a:lnSpc>
             </a:pPr>
             <a:r>
-              <a:rPr sz="520" b="1" spc="120">
+              <a:rPr sz="480" b="1" spc="140">
                 <a:solidFill>
                   <a:srgbClr val="6C1E49"/>
                 </a:solidFill>
@@ -3466,14 +4025,14 @@
       </p:sp>
       <p:sp>
         <p:nvSpPr>
-          <p:cNvPr id="12" name="텍스트"/>
+          <p:cNvPr id="39" name="텍스트"/>
           <p:cNvSpPr txBox="1"/>
           <p:nvPr/>
         </p:nvSpPr>
         <p:spPr>
           <a:xfrm>
-            <a:off x="1735200" y="1447200"/>
-            <a:ext cx="1440000" cy="133351"/>
+            <a:off x="1267200" y="1504800"/>
+            <a:ext cx="1188000" cy="123826"/>
           </a:xfrm>
           <a:prstGeom prst="rect">
             <a:avLst/>
@@ -3488,11 +4047,11 @@
           <a:p>
             <a:pPr algn="l">
               <a:lnSpc>
-                <a:spcPts val="1015"/>
+                <a:spcPts val="942"/>
               </a:lnSpc>
             </a:pPr>
             <a:r>
-              <a:rPr sz="700" b="0">
+              <a:rPr sz="650" b="0">
                 <a:solidFill>
                   <a:srgbClr val="12151C"/>
                 </a:solidFill>
@@ -3506,14 +4065,14 @@
       </p:sp>
       <p:sp>
         <p:nvSpPr>
-          <p:cNvPr id="13" name="텍스트"/>
+          <p:cNvPr id="40" name="텍스트"/>
           <p:cNvSpPr txBox="1"/>
           <p:nvPr/>
         </p:nvSpPr>
         <p:spPr>
           <a:xfrm>
-            <a:off x="1404000" y="1587600"/>
-            <a:ext cx="331200" cy="99061"/>
+            <a:off x="936000" y="1638000"/>
+            <a:ext cx="331200" cy="91441"/>
           </a:xfrm>
           <a:prstGeom prst="rect">
             <a:avLst/>
@@ -3528,11 +4087,11 @@
           <a:p>
             <a:pPr algn="l">
               <a:lnSpc>
-                <a:spcPts val="754"/>
+                <a:spcPts val="696"/>
               </a:lnSpc>
             </a:pPr>
             <a:r>
-              <a:rPr sz="520" b="1" spc="120">
+              <a:rPr sz="480" b="1" spc="140">
                 <a:solidFill>
                   <a:srgbClr val="6C1E49"/>
                 </a:solidFill>
@@ -3546,14 +4105,14 @@
       </p:sp>
       <p:sp>
         <p:nvSpPr>
-          <p:cNvPr id="14" name="텍스트"/>
+          <p:cNvPr id="41" name="텍스트"/>
           <p:cNvSpPr txBox="1"/>
           <p:nvPr/>
         </p:nvSpPr>
         <p:spPr>
           <a:xfrm>
-            <a:off x="1735200" y="1576800"/>
-            <a:ext cx="1440000" cy="133351"/>
+            <a:off x="1267200" y="1627200"/>
+            <a:ext cx="1188000" cy="123826"/>
           </a:xfrm>
           <a:prstGeom prst="rect">
             <a:avLst/>
@@ -3568,11 +4127,11 @@
           <a:p>
             <a:pPr algn="l">
               <a:lnSpc>
-                <a:spcPts val="1015"/>
+                <a:spcPts val="942"/>
               </a:lnSpc>
             </a:pPr>
             <a:r>
-              <a:rPr sz="700" b="0">
+              <a:rPr sz="650" b="0">
                 <a:solidFill>
                   <a:srgbClr val="12151C"/>
                 </a:solidFill>
@@ -3618,8 +4177,8 @@
         </p:nvSpPr>
         <p:spPr>
           <a:xfrm>
-            <a:off x="2088000" y="0"/>
-            <a:ext cx="1152000" cy="1800000"/>
+            <a:off x="0" y="0"/>
+            <a:ext cx="1188000" cy="1800000"/>
           </a:xfrm>
           <a:prstGeom prst="rect">
             <a:avLst/>
@@ -3639,22 +4198,652 @@
           </a:p>
         </p:txBody>
       </p:sp>
-      <p:sp>
-        <p:nvSpPr>
-          <p:cNvPr id="3" name="Oval 2"/>
+      <p:cxnSp>
+        <p:nvCxnSpPr>
+          <p:cNvPr id="3" name="Connector 2"/>
+          <p:cNvCxnSpPr/>
+          <p:nvPr/>
+        </p:nvCxnSpPr>
+        <p:spPr>
+          <a:xfrm flipV="1">
+            <a:off x="0" y="1224000"/>
+            <a:ext cx="57600" cy="57600"/>
+          </a:xfrm>
+          <a:prstGeom prst="line">
+            <a:avLst/>
+          </a:prstGeom>
+          <a:ln w="3600">
+            <a:solidFill>
+              <a:srgbClr val="FFFFFF"/>
+            </a:solidFill>
+          </a:ln>
+        </p:spPr>
+      </p:cxnSp>
+      <p:cxnSp>
+        <p:nvCxnSpPr>
+          <p:cNvPr id="4" name="Connector 3"/>
+          <p:cNvCxnSpPr/>
+          <p:nvPr/>
+        </p:nvCxnSpPr>
+        <p:spPr>
+          <a:xfrm flipV="1">
+            <a:off x="0" y="1224000"/>
+            <a:ext cx="115200" cy="115200"/>
+          </a:xfrm>
+          <a:prstGeom prst="line">
+            <a:avLst/>
+          </a:prstGeom>
+          <a:ln w="3600">
+            <a:solidFill>
+              <a:srgbClr val="FFFFFF"/>
+            </a:solidFill>
+          </a:ln>
+        </p:spPr>
+      </p:cxnSp>
+      <p:cxnSp>
+        <p:nvCxnSpPr>
+          <p:cNvPr id="5" name="Connector 4"/>
+          <p:cNvCxnSpPr/>
+          <p:nvPr/>
+        </p:nvCxnSpPr>
+        <p:spPr>
+          <a:xfrm flipV="1">
+            <a:off x="0" y="1224000"/>
+            <a:ext cx="172800" cy="172800"/>
+          </a:xfrm>
+          <a:prstGeom prst="line">
+            <a:avLst/>
+          </a:prstGeom>
+          <a:ln w="3600">
+            <a:solidFill>
+              <a:srgbClr val="FFFFFF"/>
+            </a:solidFill>
+          </a:ln>
+        </p:spPr>
+      </p:cxnSp>
+      <p:cxnSp>
+        <p:nvCxnSpPr>
+          <p:cNvPr id="6" name="Connector 5"/>
+          <p:cNvCxnSpPr/>
+          <p:nvPr/>
+        </p:nvCxnSpPr>
+        <p:spPr>
+          <a:xfrm flipV="1">
+            <a:off x="0" y="1224000"/>
+            <a:ext cx="230400" cy="230400"/>
+          </a:xfrm>
+          <a:prstGeom prst="line">
+            <a:avLst/>
+          </a:prstGeom>
+          <a:ln w="3600">
+            <a:solidFill>
+              <a:srgbClr val="FFFFFF"/>
+            </a:solidFill>
+          </a:ln>
+        </p:spPr>
+      </p:cxnSp>
+      <p:cxnSp>
+        <p:nvCxnSpPr>
+          <p:cNvPr id="7" name="Connector 6"/>
+          <p:cNvCxnSpPr/>
+          <p:nvPr/>
+        </p:nvCxnSpPr>
+        <p:spPr>
+          <a:xfrm flipV="1">
+            <a:off x="0" y="1224000"/>
+            <a:ext cx="288000" cy="288000"/>
+          </a:xfrm>
+          <a:prstGeom prst="line">
+            <a:avLst/>
+          </a:prstGeom>
+          <a:ln w="3600">
+            <a:solidFill>
+              <a:srgbClr val="FFFFFF"/>
+            </a:solidFill>
+          </a:ln>
+        </p:spPr>
+      </p:cxnSp>
+      <p:cxnSp>
+        <p:nvCxnSpPr>
+          <p:cNvPr id="8" name="Connector 7"/>
+          <p:cNvCxnSpPr/>
+          <p:nvPr/>
+        </p:nvCxnSpPr>
+        <p:spPr>
+          <a:xfrm flipV="1">
+            <a:off x="0" y="1224000"/>
+            <a:ext cx="345600" cy="345600"/>
+          </a:xfrm>
+          <a:prstGeom prst="line">
+            <a:avLst/>
+          </a:prstGeom>
+          <a:ln w="3600">
+            <a:solidFill>
+              <a:srgbClr val="FFFFFF"/>
+            </a:solidFill>
+          </a:ln>
+        </p:spPr>
+      </p:cxnSp>
+      <p:cxnSp>
+        <p:nvCxnSpPr>
+          <p:cNvPr id="9" name="Connector 8"/>
+          <p:cNvCxnSpPr/>
+          <p:nvPr/>
+        </p:nvCxnSpPr>
+        <p:spPr>
+          <a:xfrm flipV="1">
+            <a:off x="0" y="1224000"/>
+            <a:ext cx="403200" cy="403200"/>
+          </a:xfrm>
+          <a:prstGeom prst="line">
+            <a:avLst/>
+          </a:prstGeom>
+          <a:ln w="3600">
+            <a:solidFill>
+              <a:srgbClr val="FFFFFF"/>
+            </a:solidFill>
+          </a:ln>
+        </p:spPr>
+      </p:cxnSp>
+      <p:cxnSp>
+        <p:nvCxnSpPr>
+          <p:cNvPr id="10" name="Connector 9"/>
+          <p:cNvCxnSpPr/>
+          <p:nvPr/>
+        </p:nvCxnSpPr>
+        <p:spPr>
+          <a:xfrm flipV="1">
+            <a:off x="0" y="1224000"/>
+            <a:ext cx="460800" cy="460800"/>
+          </a:xfrm>
+          <a:prstGeom prst="line">
+            <a:avLst/>
+          </a:prstGeom>
+          <a:ln w="3600">
+            <a:solidFill>
+              <a:srgbClr val="FFFFFF"/>
+            </a:solidFill>
+          </a:ln>
+        </p:spPr>
+      </p:cxnSp>
+      <p:cxnSp>
+        <p:nvCxnSpPr>
+          <p:cNvPr id="11" name="Connector 10"/>
+          <p:cNvCxnSpPr/>
+          <p:nvPr/>
+        </p:nvCxnSpPr>
+        <p:spPr>
+          <a:xfrm flipV="1">
+            <a:off x="0" y="1224000"/>
+            <a:ext cx="518400" cy="518400"/>
+          </a:xfrm>
+          <a:prstGeom prst="line">
+            <a:avLst/>
+          </a:prstGeom>
+          <a:ln w="3600">
+            <a:solidFill>
+              <a:srgbClr val="FFFFFF"/>
+            </a:solidFill>
+          </a:ln>
+        </p:spPr>
+      </p:cxnSp>
+      <p:cxnSp>
+        <p:nvCxnSpPr>
+          <p:cNvPr id="12" name="Connector 11"/>
+          <p:cNvCxnSpPr/>
+          <p:nvPr/>
+        </p:nvCxnSpPr>
+        <p:spPr>
+          <a:xfrm flipV="1">
+            <a:off x="0" y="1224000"/>
+            <a:ext cx="576000" cy="576000"/>
+          </a:xfrm>
+          <a:prstGeom prst="line">
+            <a:avLst/>
+          </a:prstGeom>
+          <a:ln w="3600">
+            <a:solidFill>
+              <a:srgbClr val="FFFFFF"/>
+            </a:solidFill>
+          </a:ln>
+        </p:spPr>
+      </p:cxnSp>
+      <p:cxnSp>
+        <p:nvCxnSpPr>
+          <p:cNvPr id="13" name="Connector 12"/>
+          <p:cNvCxnSpPr/>
+          <p:nvPr/>
+        </p:nvCxnSpPr>
+        <p:spPr>
+          <a:xfrm flipV="1">
+            <a:off x="57600" y="1224000"/>
+            <a:ext cx="576000" cy="576000"/>
+          </a:xfrm>
+          <a:prstGeom prst="line">
+            <a:avLst/>
+          </a:prstGeom>
+          <a:ln w="3600">
+            <a:solidFill>
+              <a:srgbClr val="FFFFFF"/>
+            </a:solidFill>
+          </a:ln>
+        </p:spPr>
+      </p:cxnSp>
+      <p:cxnSp>
+        <p:nvCxnSpPr>
+          <p:cNvPr id="14" name="Connector 13"/>
+          <p:cNvCxnSpPr/>
+          <p:nvPr/>
+        </p:nvCxnSpPr>
+        <p:spPr>
+          <a:xfrm flipV="1">
+            <a:off x="115200" y="1224000"/>
+            <a:ext cx="576000" cy="576000"/>
+          </a:xfrm>
+          <a:prstGeom prst="line">
+            <a:avLst/>
+          </a:prstGeom>
+          <a:ln w="3600">
+            <a:solidFill>
+              <a:srgbClr val="FFFFFF"/>
+            </a:solidFill>
+          </a:ln>
+        </p:spPr>
+      </p:cxnSp>
+      <p:cxnSp>
+        <p:nvCxnSpPr>
+          <p:cNvPr id="15" name="Connector 14"/>
+          <p:cNvCxnSpPr/>
+          <p:nvPr/>
+        </p:nvCxnSpPr>
+        <p:spPr>
+          <a:xfrm flipV="1">
+            <a:off x="172800" y="1224000"/>
+            <a:ext cx="576000" cy="576000"/>
+          </a:xfrm>
+          <a:prstGeom prst="line">
+            <a:avLst/>
+          </a:prstGeom>
+          <a:ln w="3600">
+            <a:solidFill>
+              <a:srgbClr val="FFFFFF"/>
+            </a:solidFill>
+          </a:ln>
+        </p:spPr>
+      </p:cxnSp>
+      <p:cxnSp>
+        <p:nvCxnSpPr>
+          <p:cNvPr id="16" name="Connector 15"/>
+          <p:cNvCxnSpPr/>
+          <p:nvPr/>
+        </p:nvCxnSpPr>
+        <p:spPr>
+          <a:xfrm flipV="1">
+            <a:off x="230400" y="1224000"/>
+            <a:ext cx="576000" cy="576000"/>
+          </a:xfrm>
+          <a:prstGeom prst="line">
+            <a:avLst/>
+          </a:prstGeom>
+          <a:ln w="3600">
+            <a:solidFill>
+              <a:srgbClr val="FFFFFF"/>
+            </a:solidFill>
+          </a:ln>
+        </p:spPr>
+      </p:cxnSp>
+      <p:cxnSp>
+        <p:nvCxnSpPr>
+          <p:cNvPr id="17" name="Connector 16"/>
+          <p:cNvCxnSpPr/>
+          <p:nvPr/>
+        </p:nvCxnSpPr>
+        <p:spPr>
+          <a:xfrm flipV="1">
+            <a:off x="288000" y="1224000"/>
+            <a:ext cx="576000" cy="576000"/>
+          </a:xfrm>
+          <a:prstGeom prst="line">
+            <a:avLst/>
+          </a:prstGeom>
+          <a:ln w="3600">
+            <a:solidFill>
+              <a:srgbClr val="FFFFFF"/>
+            </a:solidFill>
+          </a:ln>
+        </p:spPr>
+      </p:cxnSp>
+      <p:cxnSp>
+        <p:nvCxnSpPr>
+          <p:cNvPr id="18" name="Connector 17"/>
+          <p:cNvCxnSpPr/>
+          <p:nvPr/>
+        </p:nvCxnSpPr>
+        <p:spPr>
+          <a:xfrm flipV="1">
+            <a:off x="345600" y="1224000"/>
+            <a:ext cx="576000" cy="576000"/>
+          </a:xfrm>
+          <a:prstGeom prst="line">
+            <a:avLst/>
+          </a:prstGeom>
+          <a:ln w="3600">
+            <a:solidFill>
+              <a:srgbClr val="FFFFFF"/>
+            </a:solidFill>
+          </a:ln>
+        </p:spPr>
+      </p:cxnSp>
+      <p:cxnSp>
+        <p:nvCxnSpPr>
+          <p:cNvPr id="19" name="Connector 18"/>
+          <p:cNvCxnSpPr/>
+          <p:nvPr/>
+        </p:nvCxnSpPr>
+        <p:spPr>
+          <a:xfrm flipV="1">
+            <a:off x="403200" y="1224000"/>
+            <a:ext cx="576000" cy="576000"/>
+          </a:xfrm>
+          <a:prstGeom prst="line">
+            <a:avLst/>
+          </a:prstGeom>
+          <a:ln w="3600">
+            <a:solidFill>
+              <a:srgbClr val="FFFFFF"/>
+            </a:solidFill>
+          </a:ln>
+        </p:spPr>
+      </p:cxnSp>
+      <p:cxnSp>
+        <p:nvCxnSpPr>
+          <p:cNvPr id="20" name="Connector 19"/>
+          <p:cNvCxnSpPr/>
+          <p:nvPr/>
+        </p:nvCxnSpPr>
+        <p:spPr>
+          <a:xfrm flipV="1">
+            <a:off x="460800" y="1224000"/>
+            <a:ext cx="576000" cy="576000"/>
+          </a:xfrm>
+          <a:prstGeom prst="line">
+            <a:avLst/>
+          </a:prstGeom>
+          <a:ln w="3600">
+            <a:solidFill>
+              <a:srgbClr val="FFFFFF"/>
+            </a:solidFill>
+          </a:ln>
+        </p:spPr>
+      </p:cxnSp>
+      <p:cxnSp>
+        <p:nvCxnSpPr>
+          <p:cNvPr id="21" name="Connector 20"/>
+          <p:cNvCxnSpPr/>
+          <p:nvPr/>
+        </p:nvCxnSpPr>
+        <p:spPr>
+          <a:xfrm flipV="1">
+            <a:off x="518400" y="1224000"/>
+            <a:ext cx="576000" cy="576000"/>
+          </a:xfrm>
+          <a:prstGeom prst="line">
+            <a:avLst/>
+          </a:prstGeom>
+          <a:ln w="3600">
+            <a:solidFill>
+              <a:srgbClr val="FFFFFF"/>
+            </a:solidFill>
+          </a:ln>
+        </p:spPr>
+      </p:cxnSp>
+      <p:cxnSp>
+        <p:nvCxnSpPr>
+          <p:cNvPr id="22" name="Connector 21"/>
+          <p:cNvCxnSpPr/>
+          <p:nvPr/>
+        </p:nvCxnSpPr>
+        <p:spPr>
+          <a:xfrm flipV="1">
+            <a:off x="576000" y="1224000"/>
+            <a:ext cx="576000" cy="576000"/>
+          </a:xfrm>
+          <a:prstGeom prst="line">
+            <a:avLst/>
+          </a:prstGeom>
+          <a:ln w="3600">
+            <a:solidFill>
+              <a:srgbClr val="FFFFFF"/>
+            </a:solidFill>
+          </a:ln>
+        </p:spPr>
+      </p:cxnSp>
+      <p:cxnSp>
+        <p:nvCxnSpPr>
+          <p:cNvPr id="23" name="Connector 22"/>
+          <p:cNvCxnSpPr/>
+          <p:nvPr/>
+        </p:nvCxnSpPr>
+        <p:spPr>
+          <a:xfrm flipV="1">
+            <a:off x="633600" y="1245600"/>
+            <a:ext cx="554400" cy="554400"/>
+          </a:xfrm>
+          <a:prstGeom prst="line">
+            <a:avLst/>
+          </a:prstGeom>
+          <a:ln w="3600">
+            <a:solidFill>
+              <a:srgbClr val="FFFFFF"/>
+            </a:solidFill>
+          </a:ln>
+        </p:spPr>
+      </p:cxnSp>
+      <p:cxnSp>
+        <p:nvCxnSpPr>
+          <p:cNvPr id="24" name="Connector 23"/>
+          <p:cNvCxnSpPr/>
+          <p:nvPr/>
+        </p:nvCxnSpPr>
+        <p:spPr>
+          <a:xfrm flipV="1">
+            <a:off x="691200" y="1303200"/>
+            <a:ext cx="496800" cy="496800"/>
+          </a:xfrm>
+          <a:prstGeom prst="line">
+            <a:avLst/>
+          </a:prstGeom>
+          <a:ln w="3600">
+            <a:solidFill>
+              <a:srgbClr val="FFFFFF"/>
+            </a:solidFill>
+          </a:ln>
+        </p:spPr>
+      </p:cxnSp>
+      <p:cxnSp>
+        <p:nvCxnSpPr>
+          <p:cNvPr id="25" name="Connector 24"/>
+          <p:cNvCxnSpPr/>
+          <p:nvPr/>
+        </p:nvCxnSpPr>
+        <p:spPr>
+          <a:xfrm flipV="1">
+            <a:off x="748800" y="1360800"/>
+            <a:ext cx="439200" cy="439200"/>
+          </a:xfrm>
+          <a:prstGeom prst="line">
+            <a:avLst/>
+          </a:prstGeom>
+          <a:ln w="3600">
+            <a:solidFill>
+              <a:srgbClr val="FFFFFF"/>
+            </a:solidFill>
+          </a:ln>
+        </p:spPr>
+      </p:cxnSp>
+      <p:cxnSp>
+        <p:nvCxnSpPr>
+          <p:cNvPr id="26" name="Connector 25"/>
+          <p:cNvCxnSpPr/>
+          <p:nvPr/>
+        </p:nvCxnSpPr>
+        <p:spPr>
+          <a:xfrm flipV="1">
+            <a:off x="806400" y="1418400"/>
+            <a:ext cx="381600" cy="381600"/>
+          </a:xfrm>
+          <a:prstGeom prst="line">
+            <a:avLst/>
+          </a:prstGeom>
+          <a:ln w="3600">
+            <a:solidFill>
+              <a:srgbClr val="FFFFFF"/>
+            </a:solidFill>
+          </a:ln>
+        </p:spPr>
+      </p:cxnSp>
+      <p:cxnSp>
+        <p:nvCxnSpPr>
+          <p:cNvPr id="27" name="Connector 26"/>
+          <p:cNvCxnSpPr/>
+          <p:nvPr/>
+        </p:nvCxnSpPr>
+        <p:spPr>
+          <a:xfrm flipV="1">
+            <a:off x="864000" y="1476000"/>
+            <a:ext cx="324000" cy="324000"/>
+          </a:xfrm>
+          <a:prstGeom prst="line">
+            <a:avLst/>
+          </a:prstGeom>
+          <a:ln w="3600">
+            <a:solidFill>
+              <a:srgbClr val="FFFFFF"/>
+            </a:solidFill>
+          </a:ln>
+        </p:spPr>
+      </p:cxnSp>
+      <p:cxnSp>
+        <p:nvCxnSpPr>
+          <p:cNvPr id="28" name="Connector 27"/>
+          <p:cNvCxnSpPr/>
+          <p:nvPr/>
+        </p:nvCxnSpPr>
+        <p:spPr>
+          <a:xfrm flipV="1">
+            <a:off x="921600" y="1533600"/>
+            <a:ext cx="266400" cy="266400"/>
+          </a:xfrm>
+          <a:prstGeom prst="line">
+            <a:avLst/>
+          </a:prstGeom>
+          <a:ln w="3600">
+            <a:solidFill>
+              <a:srgbClr val="FFFFFF"/>
+            </a:solidFill>
+          </a:ln>
+        </p:spPr>
+      </p:cxnSp>
+      <p:cxnSp>
+        <p:nvCxnSpPr>
+          <p:cNvPr id="29" name="Connector 28"/>
+          <p:cNvCxnSpPr/>
+          <p:nvPr/>
+        </p:nvCxnSpPr>
+        <p:spPr>
+          <a:xfrm flipV="1">
+            <a:off x="979200" y="1591200"/>
+            <a:ext cx="208800" cy="208800"/>
+          </a:xfrm>
+          <a:prstGeom prst="line">
+            <a:avLst/>
+          </a:prstGeom>
+          <a:ln w="3600">
+            <a:solidFill>
+              <a:srgbClr val="FFFFFF"/>
+            </a:solidFill>
+          </a:ln>
+        </p:spPr>
+      </p:cxnSp>
+      <p:cxnSp>
+        <p:nvCxnSpPr>
+          <p:cNvPr id="30" name="Connector 29"/>
+          <p:cNvCxnSpPr/>
+          <p:nvPr/>
+        </p:nvCxnSpPr>
+        <p:spPr>
+          <a:xfrm flipV="1">
+            <a:off x="1036800" y="1648800"/>
+            <a:ext cx="151200" cy="151200"/>
+          </a:xfrm>
+          <a:prstGeom prst="line">
+            <a:avLst/>
+          </a:prstGeom>
+          <a:ln w="3600">
+            <a:solidFill>
+              <a:srgbClr val="FFFFFF"/>
+            </a:solidFill>
+          </a:ln>
+        </p:spPr>
+      </p:cxnSp>
+      <p:cxnSp>
+        <p:nvCxnSpPr>
+          <p:cNvPr id="31" name="Connector 30"/>
+          <p:cNvCxnSpPr/>
+          <p:nvPr/>
+        </p:nvCxnSpPr>
+        <p:spPr>
+          <a:xfrm flipV="1">
+            <a:off x="1094400" y="1706400"/>
+            <a:ext cx="93600" cy="93600"/>
+          </a:xfrm>
+          <a:prstGeom prst="line">
+            <a:avLst/>
+          </a:prstGeom>
+          <a:ln w="3600">
+            <a:solidFill>
+              <a:srgbClr val="FFFFFF"/>
+            </a:solidFill>
+          </a:ln>
+        </p:spPr>
+      </p:cxnSp>
+      <p:cxnSp>
+        <p:nvCxnSpPr>
+          <p:cNvPr id="32" name="Connector 31"/>
+          <p:cNvCxnSpPr/>
+          <p:nvPr/>
+        </p:nvCxnSpPr>
+        <p:spPr>
+          <a:xfrm flipV="1">
+            <a:off x="1152000" y="1764000"/>
+            <a:ext cx="36000" cy="36000"/>
+          </a:xfrm>
+          <a:prstGeom prst="line">
+            <a:avLst/>
+          </a:prstGeom>
+          <a:ln w="3600">
+            <a:solidFill>
+              <a:srgbClr val="FFFFFF"/>
+            </a:solidFill>
+          </a:ln>
+        </p:spPr>
+      </p:cxnSp>
+      <p:sp>
+        <p:nvSpPr>
+          <p:cNvPr id="33" name="Oval 32"/>
           <p:cNvSpPr/>
           <p:nvPr/>
         </p:nvSpPr>
         <p:spPr>
           <a:xfrm>
-            <a:off x="2397600" y="633600"/>
-            <a:ext cx="532800" cy="532800"/>
+            <a:off x="216000" y="252000"/>
+            <a:ext cx="288000" cy="288000"/>
           </a:xfrm>
           <a:prstGeom prst="ellipse">
             <a:avLst/>
           </a:prstGeom>
           <a:noFill/>
-          <a:ln w="10800">
+          <a:ln w="5760">
             <a:solidFill>
               <a:srgbClr val="FFFFFF"/>
             </a:solidFill>
@@ -3670,14 +4859,14 @@
       </p:sp>
       <p:sp>
         <p:nvSpPr>
-          <p:cNvPr id="4" name="텍스트"/>
+          <p:cNvPr id="34" name="텍스트"/>
           <p:cNvSpPr txBox="1"/>
           <p:nvPr/>
         </p:nvSpPr>
         <p:spPr>
           <a:xfrm>
-            <a:off x="2304000" y="684000"/>
-            <a:ext cx="720000" cy="432000"/>
+            <a:off x="216000" y="252000"/>
+            <a:ext cx="288000" cy="288000"/>
           </a:xfrm>
           <a:prstGeom prst="rect">
             <a:avLst/>
@@ -3692,11 +4881,11 @@
           <a:p>
             <a:pPr algn="ctr">
               <a:lnSpc>
-                <a:spcPts val="4350"/>
+                <a:spcPts val="2030"/>
               </a:lnSpc>
             </a:pPr>
             <a:r>
-              <a:rPr sz="3000" b="1">
+              <a:rPr sz="1400" b="1">
                 <a:solidFill>
                   <a:srgbClr val="FFFFFF"/>
                 </a:solidFill>
@@ -3710,14 +4899,14 @@
       </p:sp>
       <p:sp>
         <p:nvSpPr>
-          <p:cNvPr id="5" name="텍스트"/>
+          <p:cNvPr id="35" name="텍스트"/>
           <p:cNvSpPr txBox="1"/>
           <p:nvPr/>
         </p:nvSpPr>
         <p:spPr>
           <a:xfrm>
-            <a:off x="252000" y="540000"/>
-            <a:ext cx="1620000" cy="720000"/>
+            <a:off x="216000" y="1440000"/>
+            <a:ext cx="828000" cy="142876"/>
           </a:xfrm>
           <a:prstGeom prst="rect">
             <a:avLst/>
@@ -3732,49 +4921,154 @@
           <a:p>
             <a:pPr algn="l">
               <a:lnSpc>
-                <a:spcPts val="1739"/>
+                <a:spcPts val="1087"/>
               </a:lnSpc>
             </a:pPr>
             <a:r>
-              <a:rPr sz="1200" b="1">
+              <a:rPr sz="750" b="1" spc="100">
                 <a:solidFill>
                   <a:srgbClr val="FFFFFF"/>
                 </a:solidFill>
                 <a:latin typeface="맑은 고딕"/>
                 <a:ea typeface="맑은 고딕"/>
               </a:rPr>
-              <a:t>순간을 오래 남기는</a:t>
-            </a:r>
-          </a:p>
+              <a:t>작업 분야</a:t>
+            </a:r>
+          </a:p>
+        </p:txBody>
+      </p:sp>
+      <p:sp>
+        <p:nvSpPr>
+          <p:cNvPr id="36" name="텍스트"/>
+          <p:cNvSpPr txBox="1"/>
+          <p:nvPr/>
+        </p:nvSpPr>
+        <p:spPr>
+          <a:xfrm>
+            <a:off x="1440000" y="223200"/>
+            <a:ext cx="1080000" cy="99061"/>
+          </a:xfrm>
+          <a:prstGeom prst="rect">
+            <a:avLst/>
+          </a:prstGeom>
+          <a:noFill/>
+        </p:spPr>
+        <p:txBody>
+          <a:bodyPr wrap="square" lIns="0" rIns="0" tIns="0" bIns="0" anchor="t">
+            <a:spAutoFit/>
+          </a:bodyPr>
+          <a:lstStyle/>
           <a:p>
             <a:pPr algn="l">
               <a:lnSpc>
-                <a:spcPts val="1739"/>
+                <a:spcPts val="754"/>
               </a:lnSpc>
             </a:pPr>
             <a:r>
-              <a:rPr sz="1200" b="1">
+              <a:rPr sz="520" b="1" spc="240">
+                <a:solidFill>
+                  <a:srgbClr val="A3A9B5"/>
+                </a:solidFill>
+                <a:latin typeface="맑은 고딕"/>
+                <a:ea typeface="맑은 고딕"/>
+              </a:rPr>
+              <a:t>작업 분야</a:t>
+            </a:r>
+          </a:p>
+        </p:txBody>
+      </p:sp>
+      <p:cxnSp>
+        <p:nvCxnSpPr>
+          <p:cNvPr id="37" name="Connector 36"/>
+          <p:cNvCxnSpPr/>
+          <p:nvPr/>
+        </p:nvCxnSpPr>
+        <p:spPr>
+          <a:xfrm>
+            <a:off x="1440000" y="360000"/>
+            <a:ext cx="1548000" cy="0"/>
+          </a:xfrm>
+          <a:prstGeom prst="line">
+            <a:avLst/>
+          </a:prstGeom>
+          <a:ln w="3600">
+            <a:solidFill>
+              <a:srgbClr val="2A2F38"/>
+            </a:solidFill>
+          </a:ln>
+        </p:spPr>
+      </p:cxnSp>
+      <p:sp>
+        <p:nvSpPr>
+          <p:cNvPr id="38" name="텍스트"/>
+          <p:cNvSpPr txBox="1"/>
+          <p:nvPr/>
+        </p:nvSpPr>
+        <p:spPr>
+          <a:xfrm>
+            <a:off x="1440000" y="403200"/>
+            <a:ext cx="1296000" cy="133351"/>
+          </a:xfrm>
+          <a:prstGeom prst="rect">
+            <a:avLst/>
+          </a:prstGeom>
+          <a:noFill/>
+        </p:spPr>
+        <p:txBody>
+          <a:bodyPr wrap="square" lIns="0" rIns="0" tIns="0" bIns="0" anchor="t">
+            <a:spAutoFit/>
+          </a:bodyPr>
+          <a:lstStyle/>
+          <a:p>
+            <a:pPr algn="l">
+              <a:lnSpc>
+                <a:spcPts val="1015"/>
+              </a:lnSpc>
+            </a:pPr>
+            <a:r>
+              <a:rPr sz="700" b="0">
                 <a:solidFill>
                   <a:srgbClr val="FFFFFF"/>
                 </a:solidFill>
                 <a:latin typeface="맑은 고딕"/>
                 <a:ea typeface="맑은 고딕"/>
               </a:rPr>
-              <a:t>일을 합니다</a:t>
-            </a:r>
-          </a:p>
-        </p:txBody>
-      </p:sp>
-      <p:sp>
-        <p:nvSpPr>
-          <p:cNvPr id="6" name="텍스트"/>
+              <a:t>편집 디자인</a:t>
+            </a:r>
+          </a:p>
+        </p:txBody>
+      </p:sp>
+      <p:cxnSp>
+        <p:nvCxnSpPr>
+          <p:cNvPr id="39" name="Connector 38"/>
+          <p:cNvCxnSpPr/>
+          <p:nvPr/>
+        </p:nvCxnSpPr>
+        <p:spPr>
+          <a:xfrm>
+            <a:off x="1440000" y="561600"/>
+            <a:ext cx="1548000" cy="0"/>
+          </a:xfrm>
+          <a:prstGeom prst="line">
+            <a:avLst/>
+          </a:prstGeom>
+          <a:ln w="3600">
+            <a:solidFill>
+              <a:srgbClr val="2A2F38"/>
+            </a:solidFill>
+          </a:ln>
+        </p:spPr>
+      </p:cxnSp>
+      <p:sp>
+        <p:nvSpPr>
+          <p:cNvPr id="40" name="텍스트"/>
           <p:cNvSpPr txBox="1"/>
           <p:nvPr/>
         </p:nvSpPr>
         <p:spPr>
           <a:xfrm>
-            <a:off x="252000" y="1512000"/>
-            <a:ext cx="1584000" cy="123826"/>
+            <a:off x="1440000" y="604800"/>
+            <a:ext cx="1296000" cy="133351"/>
           </a:xfrm>
           <a:prstGeom prst="rect">
             <a:avLst/>
@@ -3789,18 +5083,201 @@
           <a:p>
             <a:pPr algn="l">
               <a:lnSpc>
-                <a:spcPts val="942"/>
+                <a:spcPts val="1015"/>
               </a:lnSpc>
             </a:pPr>
             <a:r>
-              <a:rPr sz="650" b="1" spc="200">
+              <a:rPr sz="700" b="0">
+                <a:solidFill>
+                  <a:srgbClr val="FFFFFF"/>
+                </a:solidFill>
+                <a:latin typeface="맑은 고딕"/>
+                <a:ea typeface="맑은 고딕"/>
+              </a:rPr>
+              <a:t>일러스트</a:t>
+            </a:r>
+          </a:p>
+        </p:txBody>
+      </p:sp>
+      <p:cxnSp>
+        <p:nvCxnSpPr>
+          <p:cNvPr id="41" name="Connector 40"/>
+          <p:cNvCxnSpPr/>
+          <p:nvPr/>
+        </p:nvCxnSpPr>
+        <p:spPr>
+          <a:xfrm>
+            <a:off x="1440000" y="763200"/>
+            <a:ext cx="1548000" cy="0"/>
+          </a:xfrm>
+          <a:prstGeom prst="line">
+            <a:avLst/>
+          </a:prstGeom>
+          <a:ln w="3600">
+            <a:solidFill>
+              <a:srgbClr val="2A2F38"/>
+            </a:solidFill>
+          </a:ln>
+        </p:spPr>
+      </p:cxnSp>
+      <p:sp>
+        <p:nvSpPr>
+          <p:cNvPr id="42" name="텍스트"/>
+          <p:cNvSpPr txBox="1"/>
+          <p:nvPr/>
+        </p:nvSpPr>
+        <p:spPr>
+          <a:xfrm>
+            <a:off x="1440000" y="806400"/>
+            <a:ext cx="1296000" cy="133351"/>
+          </a:xfrm>
+          <a:prstGeom prst="rect">
+            <a:avLst/>
+          </a:prstGeom>
+          <a:noFill/>
+        </p:spPr>
+        <p:txBody>
+          <a:bodyPr wrap="square" lIns="0" rIns="0" tIns="0" bIns="0" anchor="t">
+            <a:spAutoFit/>
+          </a:bodyPr>
+          <a:lstStyle/>
+          <a:p>
+            <a:pPr algn="l">
+              <a:lnSpc>
+                <a:spcPts val="1015"/>
+              </a:lnSpc>
+            </a:pPr>
+            <a:r>
+              <a:rPr sz="700" b="0">
+                <a:solidFill>
+                  <a:srgbClr val="FFFFFF"/>
+                </a:solidFill>
+                <a:latin typeface="맑은 고딕"/>
+                <a:ea typeface="맑은 고딕"/>
+              </a:rPr>
+              <a:t>모션 그래픽</a:t>
+            </a:r>
+          </a:p>
+        </p:txBody>
+      </p:sp>
+      <p:cxnSp>
+        <p:nvCxnSpPr>
+          <p:cNvPr id="43" name="Connector 42"/>
+          <p:cNvCxnSpPr/>
+          <p:nvPr/>
+        </p:nvCxnSpPr>
+        <p:spPr>
+          <a:xfrm>
+            <a:off x="1440000" y="964800"/>
+            <a:ext cx="1548000" cy="0"/>
+          </a:xfrm>
+          <a:prstGeom prst="line">
+            <a:avLst/>
+          </a:prstGeom>
+          <a:ln w="3600">
+            <a:solidFill>
+              <a:srgbClr val="2A2F38"/>
+            </a:solidFill>
+          </a:ln>
+        </p:spPr>
+      </p:cxnSp>
+      <p:sp>
+        <p:nvSpPr>
+          <p:cNvPr id="44" name="텍스트"/>
+          <p:cNvSpPr txBox="1"/>
+          <p:nvPr/>
+        </p:nvSpPr>
+        <p:spPr>
+          <a:xfrm>
+            <a:off x="1440000" y="1008000"/>
+            <a:ext cx="1296000" cy="133351"/>
+          </a:xfrm>
+          <a:prstGeom prst="rect">
+            <a:avLst/>
+          </a:prstGeom>
+          <a:noFill/>
+        </p:spPr>
+        <p:txBody>
+          <a:bodyPr wrap="square" lIns="0" rIns="0" tIns="0" bIns="0" anchor="t">
+            <a:spAutoFit/>
+          </a:bodyPr>
+          <a:lstStyle/>
+          <a:p>
+            <a:pPr algn="l">
+              <a:lnSpc>
+                <a:spcPts val="1015"/>
+              </a:lnSpc>
+            </a:pPr>
+            <a:r>
+              <a:rPr sz="700" b="0">
+                <a:solidFill>
+                  <a:srgbClr val="FFFFFF"/>
+                </a:solidFill>
+                <a:latin typeface="맑은 고딕"/>
+                <a:ea typeface="맑은 고딕"/>
+              </a:rPr>
+              <a:t>인물 촬영</a:t>
+            </a:r>
+          </a:p>
+        </p:txBody>
+      </p:sp>
+      <p:cxnSp>
+        <p:nvCxnSpPr>
+          <p:cNvPr id="45" name="Connector 44"/>
+          <p:cNvCxnSpPr/>
+          <p:nvPr/>
+        </p:nvCxnSpPr>
+        <p:spPr>
+          <a:xfrm>
+            <a:off x="1440000" y="1166400"/>
+            <a:ext cx="1548000" cy="0"/>
+          </a:xfrm>
+          <a:prstGeom prst="line">
+            <a:avLst/>
+          </a:prstGeom>
+          <a:ln w="3600">
+            <a:solidFill>
+              <a:srgbClr val="2A2F38"/>
+            </a:solidFill>
+          </a:ln>
+        </p:spPr>
+      </p:cxnSp>
+      <p:sp>
+        <p:nvSpPr>
+          <p:cNvPr id="46" name="텍스트"/>
+          <p:cNvSpPr txBox="1"/>
+          <p:nvPr/>
+        </p:nvSpPr>
+        <p:spPr>
+          <a:xfrm>
+            <a:off x="1440000" y="1569600"/>
+            <a:ext cx="1548000" cy="114301"/>
+          </a:xfrm>
+          <a:prstGeom prst="rect">
+            <a:avLst/>
+          </a:prstGeom>
+          <a:noFill/>
+        </p:spPr>
+        <p:txBody>
+          <a:bodyPr wrap="square" lIns="0" rIns="0" tIns="0" bIns="0" anchor="t">
+            <a:spAutoFit/>
+          </a:bodyPr>
+          <a:lstStyle/>
+          <a:p>
+            <a:pPr algn="l">
+              <a:lnSpc>
+                <a:spcPts val="869"/>
+              </a:lnSpc>
+            </a:pPr>
+            <a:r>
+              <a:rPr sz="600" b="0">
                 <a:solidFill>
                   <a:srgbClr val="A3A9B5"/>
                 </a:solidFill>
                 <a:latin typeface="맑은 고딕"/>
                 <a:ea typeface="맑은 고딕"/>
               </a:rPr>
-              <a:t>스튜디오 이름</a:t>
+              <a:t>평일 10:00 – 19:00   |   @채널아이디</a:t>
             </a:r>
           </a:p>
         </p:txBody>
